--- a/피킹_프로세스_효율화_및_생산성_극대화_20260709235709.pptx
+++ b/피킹_프로세스_효율화_및_생산성_극대화_20260709235709.pptx
@@ -3086,7 +3086,7 @@
           <p:nvPr>
             <p:extLst>
               <p:ext uri="{D42A27DB-BD31-4B8C-83A1-F6EECF244321}">
-                <p14:modId xmlns:p14="http://schemas.microsoft.com/office/powerpoint/2010/main" val="1877277379"/>
+                <p14:modId xmlns:p14="http://schemas.microsoft.com/office/powerpoint/2010/main" val="162875343"/>
               </p:ext>
             </p:extLst>
           </p:nvPr>
@@ -4263,7 +4263,7 @@
                           <a:ea typeface="Pretendard Variable" pitchFamily="34" charset="-122"/>
                           <a:cs typeface="Pretendard Variable" pitchFamily="34" charset="-120"/>
                         </a:rPr>
-                        <a:t>21 팔레트</a:t>
+                        <a:t>20 팔레트</a:t>
                       </a:r>
                       <a:endParaRPr lang="en-US" sz="1200" dirty="0"/>
                     </a:p>
@@ -4327,7 +4327,7 @@
                           <a:ea typeface="Pretendard Variable" pitchFamily="34" charset="-122"/>
                           <a:cs typeface="Pretendard Variable" pitchFamily="34" charset="-120"/>
                         </a:rPr>
-                        <a:t>4.2 팔레트/hr</a:t>
+                        <a:t>4.0 팔레트/hr</a:t>
                       </a:r>
                       <a:endParaRPr lang="en-US" sz="1275" dirty="0">
                         <a:latin typeface="Pretendard Variable" charset="0"/>
@@ -5134,7 +5134,7 @@
                 <a:ea typeface="Pretendard Variable" pitchFamily="34" charset="-122"/>
                 <a:cs typeface="Pretendard Variable" pitchFamily="34" charset="-120"/>
               </a:rPr>
-              <a:t>21 팔레트 · 정상 · 기준</a:t>
+              <a:t>20 팔레트 · 정상 · 기준</a:t>
             </a:r>
             <a:endParaRPr lang="en-US" sz="1100" dirty="0"/>
           </a:p>
@@ -6704,7 +6704,7 @@
                 <a:ea typeface="Pretendard Variable" pitchFamily="34" charset="-122"/>
                 <a:cs typeface="Pretendard Variable" pitchFamily="34" charset="-120"/>
               </a:rPr>
-              <a:t>완료 지점 1 → 3 (5hr)</a:t>
+              <a:t>완료 지점 1 → 4 (5hr)</a:t>
             </a:r>
             <a:endParaRPr lang="en-US" sz="1100" dirty="0"/>
           </a:p>
@@ -6813,7 +6813,7 @@
                 <a:ea typeface="Pretendard Variable" pitchFamily="34" charset="-122"/>
                 <a:cs typeface="Pretendard Variable" pitchFamily="34" charset="-120"/>
               </a:rPr>
-              <a:t>8 → 21</a:t>
+              <a:t>8 → 20</a:t>
             </a:r>
             <a:r>
               <a:rPr lang="en-US" sz="1600" b="1" dirty="0">
@@ -6835,7 +6835,7 @@
                 <a:ea typeface="Pretendard Variable" pitchFamily="34" charset="-122"/>
                 <a:cs typeface="Pretendard Variable" pitchFamily="34" charset="-120"/>
               </a:rPr>
-              <a:t>256 → 672</a:t>
+              <a:t>256 → 640</a:t>
             </a:r>
             <a:r>
               <a:rPr lang="en-US" sz="1600" b="1" dirty="0">
@@ -6857,7 +6857,7 @@
                 <a:ea typeface="Pretendard Variable" pitchFamily="34" charset="-122"/>
                 <a:cs typeface="Pretendard Variable" pitchFamily="34" charset="-120"/>
               </a:rPr>
-              <a:t>1.6 → 4.2 팔레트/hr</a:t>
+              <a:t>1.6 → 4.0 팔레트/hr</a:t>
             </a:r>
             <a:endParaRPr lang="en-US" sz="1600" dirty="0"/>
           </a:p>
@@ -7763,7 +7763,7 @@
                 <a:ea typeface="Pretendard Variable" pitchFamily="34" charset="-122"/>
                 <a:cs typeface="Pretendard Variable" pitchFamily="34" charset="-120"/>
               </a:rPr>
-              <a:t>+162</a:t>
+              <a:t>+150</a:t>
             </a:r>
             <a:r>
               <a:rPr lang="en-US" sz="2400" b="1" kern="0" spc="-112" dirty="0">
@@ -7813,7 +7813,7 @@
                 <a:ea typeface="Pretendard Variable" pitchFamily="34" charset="-122"/>
                 <a:cs typeface="Pretendard Variable" pitchFamily="34" charset="-120"/>
               </a:rPr>
-              <a:t>1.6 → 4.2 팔레트/hr (×2.6)</a:t>
+              <a:t>1.6 → 4.0 팔레트/hr (×2.5)</a:t>
             </a:r>
             <a:endParaRPr lang="en-US" sz="1100" dirty="0"/>
           </a:p>
@@ -7891,7 +7891,7 @@
                 <a:ea typeface="Pretendard Variable" pitchFamily="34" charset="-122"/>
                 <a:cs typeface="Pretendard Variable" pitchFamily="34" charset="-120"/>
               </a:rPr>
-              <a:t>+416</a:t>
+              <a:t>+384</a:t>
             </a:r>
             <a:endParaRPr lang="en-US" sz="3700" dirty="0"/>
           </a:p>
@@ -7930,7 +7930,7 @@
                 <a:ea typeface="Pretendard Variable" pitchFamily="34" charset="-122"/>
                 <a:cs typeface="Pretendard Variable" pitchFamily="34" charset="-120"/>
               </a:rPr>
-              <a:t>256 → 672 박스 (5시간 · 동일 조건)</a:t>
+              <a:t>256 → 640 박스 (5시간 · 동일 조건)</a:t>
             </a:r>
             <a:endParaRPr lang="en-US" sz="1100" dirty="0"/>
           </a:p>
@@ -9165,7 +9165,7 @@
                 <a:ea typeface="Pretendard Variable" pitchFamily="34" charset="-122"/>
                 <a:cs typeface="Pretendard Variable" pitchFamily="34" charset="-120"/>
               </a:rPr>
-              <a:t>3</a:t>
+              <a:t>4</a:t>
             </a:r>
             <a:r>
               <a:rPr lang="en-US" sz="1300" dirty="0">
@@ -9176,7 +9176,7 @@
                 <a:ea typeface="Pretendard Variable" pitchFamily="34" charset="-122"/>
                 <a:cs typeface="Pretendard Variable" pitchFamily="34" charset="-120"/>
               </a:rPr>
-              <a:t>(×3 배)</a:t>
+              <a:t>(×4 배)</a:t>
             </a:r>
             <a:endParaRPr lang="en-US" sz="1200" dirty="0"/>
           </a:p>
@@ -9276,7 +9276,7 @@
                 <a:ea typeface="Pretendard Variable" pitchFamily="34" charset="-122"/>
                 <a:cs typeface="Pretendard Variable" pitchFamily="34" charset="-120"/>
               </a:rPr>
-              <a:t>21</a:t>
+              <a:t>20</a:t>
             </a:r>
             <a:r>
               <a:rPr lang="en-US" sz="1300" dirty="0">
@@ -9287,7 +9287,7 @@
                 <a:ea typeface="Pretendard Variable" pitchFamily="34" charset="-122"/>
                 <a:cs typeface="Pretendard Variable" pitchFamily="34" charset="-120"/>
               </a:rPr>
-              <a:t>(+162%)</a:t>
+              <a:t>(+150%)</a:t>
             </a:r>
             <a:endParaRPr lang="en-US" sz="1200" dirty="0"/>
           </a:p>
@@ -9398,7 +9398,39 @@
                 <a:ea typeface="Pretendard Variable" panose="02000003000000020004" pitchFamily="2" charset="-127"/>
                 <a:cs typeface="Pretendard Variable" panose="02000003000000020004" pitchFamily="2" charset="-127"/>
               </a:rPr>
-              <a:t>추가 설비 0원 · 핵심 전략 3가지 + 안정화 설정으로 처리량 +162% · AGV −15대 · 완료 지점 ×3배</a:t>
+              <a:t>추가 설비 0원 · 핵심 전략 3가지 + 안정화 설정으로 처리량 +1</a:t>
+            </a:r>
+            <a:r>
+              <a:rPr lang="en-US" altLang="ko-KR" sz="1400" b="1" dirty="0">
+                <a:latin typeface="Pretendard Variable" panose="02000003000000020004" pitchFamily="2" charset="-127"/>
+                <a:ea typeface="Pretendard Variable" panose="02000003000000020004" pitchFamily="2" charset="-127"/>
+                <a:cs typeface="Pretendard Variable" panose="02000003000000020004" pitchFamily="2" charset="-127"/>
+              </a:rPr>
+              <a:t>50</a:t>
+            </a:r>
+            <a:r>
+              <a:rPr lang="ko-KR" altLang="ko-KR" sz="1400" b="1" dirty="0">
+                <a:latin typeface="Pretendard Variable" panose="02000003000000020004" pitchFamily="2" charset="-127"/>
+                <a:ea typeface="Pretendard Variable" panose="02000003000000020004" pitchFamily="2" charset="-127"/>
+                <a:cs typeface="Pretendard Variable" panose="02000003000000020004" pitchFamily="2" charset="-127"/>
+              </a:rPr>
+              <a:t>% · AGV −15대 · 완료 지점 ×</a:t>
+            </a:r>
+            <a:r>
+              <a:rPr lang="en-US" altLang="ko-KR" sz="1400" b="1" dirty="0">
+                <a:latin typeface="Pretendard Variable" panose="02000003000000020004" pitchFamily="2" charset="-127"/>
+                <a:ea typeface="Pretendard Variable" panose="02000003000000020004" pitchFamily="2" charset="-127"/>
+                <a:cs typeface="Pretendard Variable" panose="02000003000000020004" pitchFamily="2" charset="-127"/>
+              </a:rPr>
+              <a:t>4</a:t>
+            </a:r>
+            <a:r>
+              <a:rPr lang="ko-KR" altLang="ko-KR" sz="1400" b="1" dirty="0">
+                <a:latin typeface="Pretendard Variable" panose="02000003000000020004" pitchFamily="2" charset="-127"/>
+                <a:ea typeface="Pretendard Variable" panose="02000003000000020004" pitchFamily="2" charset="-127"/>
+                <a:cs typeface="Pretendard Variable" panose="02000003000000020004" pitchFamily="2" charset="-127"/>
+              </a:rPr>
+              <a:t>배</a:t>
             </a:r>
             <a:endParaRPr lang="en-US" sz="1400" b="1" dirty="0">
               <a:latin typeface="Pretendard Variable" panose="02000003000000020004" pitchFamily="2" charset="-127"/>
@@ -10942,7 +10974,7 @@
                 <a:ea typeface="Pretendard Variable" pitchFamily="34" charset="-122"/>
                 <a:cs typeface="Pretendard Variable" pitchFamily="34" charset="-120"/>
               </a:rPr>
-              <a:t>3/60 (×3배)</a:t>
+              <a:t>4/60 (×4배)</a:t>
             </a:r>
             <a:r>
               <a:rPr lang="en-US" sz="1100" dirty="0">
@@ -10986,7 +11018,7 @@
                 <a:ea typeface="Pretendard Variable" pitchFamily="34" charset="-122"/>
                 <a:cs typeface="Pretendard Variable" pitchFamily="34" charset="-120"/>
               </a:rPr>
-              <a:t>21 (+162%)</a:t>
+              <a:t>20 (+150%)</a:t>
             </a:r>
             <a:endParaRPr lang="en-US" sz="1100" dirty="0"/>
           </a:p>
@@ -12716,7 +12748,7 @@
                 <a:ea typeface="Pretendard Variable" pitchFamily="34" charset="-122"/>
                 <a:cs typeface="Pretendard Variable" pitchFamily="34" charset="-120"/>
               </a:rPr>
-              <a:t>+162</a:t>
+              <a:t>+150</a:t>
             </a:r>
             <a:r>
               <a:rPr lang="en-US" sz="2100" b="1" kern="0" spc="-75" dirty="0">
@@ -12766,7 +12798,7 @@
                 <a:ea typeface="Pretendard Variable" pitchFamily="34" charset="-122"/>
                 <a:cs typeface="Pretendard Variable" pitchFamily="34" charset="-120"/>
               </a:rPr>
-              <a:t>1.6 → 4.2 팔레트/hr</a:t>
+              <a:t>1.6 → 4.0 팔레트/hr</a:t>
             </a:r>
             <a:endParaRPr lang="en-US" sz="1100" dirty="0"/>
           </a:p>
@@ -12844,7 +12876,7 @@
                 <a:ea typeface="Pretendard Variable" pitchFamily="34" charset="-122"/>
                 <a:cs typeface="Pretendard Variable" pitchFamily="34" charset="-120"/>
               </a:rPr>
-              <a:t>+416</a:t>
+              <a:t>+384</a:t>
             </a:r>
             <a:endParaRPr lang="en-US" sz="3300" dirty="0"/>
           </a:p>
@@ -12883,7 +12915,7 @@
                 <a:ea typeface="Pretendard Variable" pitchFamily="34" charset="-122"/>
                 <a:cs typeface="Pretendard Variable" pitchFamily="34" charset="-120"/>
               </a:rPr>
-              <a:t>256 → 672 박스</a:t>
+              <a:t>256 → 640 박스</a:t>
             </a:r>
             <a:endParaRPr lang="en-US" sz="1100" dirty="0"/>
           </a:p>
@@ -13089,7 +13121,7 @@
                 <a:ea typeface="Pretendard Variable" pitchFamily="34" charset="-122"/>
                 <a:cs typeface="Pretendard Variable" pitchFamily="34" charset="-120"/>
               </a:rPr>
-              <a:t>×3배</a:t>
+              <a:t>×4배</a:t>
             </a:r>
             <a:endParaRPr lang="en-US" sz="3300" dirty="0"/>
           </a:p>
@@ -13128,7 +13160,18 @@
                 <a:ea typeface="Pretendard Variable" pitchFamily="34" charset="-122"/>
                 <a:cs typeface="Pretendard Variable" pitchFamily="34" charset="-120"/>
               </a:rPr>
-              <a:t>1/60 → 3/60</a:t>
+              <a:t>1/60 </a:t>
+            </a:r>
+            <a:r>
+              <a:rPr lang="en-US" sz="1100">
+                <a:solidFill>
+                  <a:srgbClr val="C9D5EA"/>
+                </a:solidFill>
+                <a:latin typeface="Pretendard Variable" pitchFamily="34" charset="0"/>
+                <a:ea typeface="Pretendard Variable" pitchFamily="34" charset="-122"/>
+                <a:cs typeface="Pretendard Variable" pitchFamily="34" charset="-120"/>
+              </a:rPr>
+              <a:t>→ 4/60</a:t>
             </a:r>
             <a:endParaRPr lang="en-US" sz="1100" dirty="0"/>
           </a:p>
@@ -14541,7 +14584,7 @@
                 <a:ea typeface="Pretendard Variable" pitchFamily="34" charset="-122"/>
                 <a:cs typeface="Pretendard Variable" pitchFamily="34" charset="-120"/>
               </a:rPr>
-              <a:t>+162</a:t>
+              <a:t>+150</a:t>
             </a:r>
             <a:r>
               <a:rPr lang="en-US" sz="1900" b="1" dirty="0">
@@ -14594,7 +14637,7 @@
                 <a:ea typeface="Pretendard Variable" pitchFamily="34" charset="-122"/>
                 <a:cs typeface="Pretendard Variable" pitchFamily="34" charset="-120"/>
               </a:rPr>
-              <a:t>1.6 → 4.2 팔레트/hr · AGV 40→25대</a:t>
+              <a:t>1.6 → 4.0 팔레트/hr · AGV 40→25대</a:t>
             </a:r>
             <a:endParaRPr lang="en-US" sz="1200" dirty="0"/>
           </a:p>
@@ -28223,7 +28266,7 @@
                 <a:ea typeface="Pretendard Variable" pitchFamily="34" charset="-122"/>
                 <a:cs typeface="Pretendard Variable" pitchFamily="34" charset="-120"/>
               </a:rPr>
-              <a:t>동일 5시간 · 동일 8,858박스 입력에서 처리량 +162%</a:t>
+              <a:t>동일 5시간 · 동일 8,858박스 입력에서 처리량 +150%</a:t>
             </a:r>
             <a:endParaRPr lang="en-US" sz="2200" dirty="0"/>
           </a:p>
@@ -28362,7 +28405,7 @@
                 <a:ea typeface="Pretendard Variable" pitchFamily="34" charset="-122"/>
                 <a:cs typeface="Pretendard Variable" pitchFamily="34" charset="-120"/>
               </a:rPr>
-              <a:t>21</a:t>
+              <a:t>20</a:t>
             </a:r>
             <a:r>
               <a:rPr lang="en-US" sz="1600" b="1" kern="0" spc="-75" dirty="0">
@@ -28412,7 +28455,7 @@
                 <a:ea typeface="Pretendard Variable" pitchFamily="34" charset="-122"/>
                 <a:cs typeface="Pretendard Variable" pitchFamily="34" charset="-120"/>
               </a:rPr>
-              <a:t>▲ +162%</a:t>
+              <a:t>▲ +150%</a:t>
             </a:r>
             <a:endParaRPr lang="en-US" sz="1500" dirty="0"/>
           </a:p>
@@ -28451,7 +28494,29 @@
                 <a:ea typeface="Pretendard Variable" pitchFamily="34" charset="-122"/>
                 <a:cs typeface="Pretendard Variable" pitchFamily="34" charset="-120"/>
               </a:rPr>
-              <a:t>256 박스 → 672 박스 (+416 박스)</a:t>
+              <a:t>256 박스 → 640 </a:t>
+            </a:r>
+            <a:r>
+              <a:rPr lang="en-US" sz="1100" dirty="0" err="1">
+                <a:solidFill>
+                  <a:srgbClr val="3A4356"/>
+                </a:solidFill>
+                <a:latin typeface="Pretendard Variable" pitchFamily="34" charset="0"/>
+                <a:ea typeface="Pretendard Variable" pitchFamily="34" charset="-122"/>
+                <a:cs typeface="Pretendard Variable" pitchFamily="34" charset="-120"/>
+              </a:rPr>
+              <a:t>박스</a:t>
+            </a:r>
+            <a:r>
+              <a:rPr lang="en-US" sz="1100" dirty="0">
+                <a:solidFill>
+                  <a:srgbClr val="3A4356"/>
+                </a:solidFill>
+                <a:latin typeface="Pretendard Variable" pitchFamily="34" charset="0"/>
+                <a:ea typeface="Pretendard Variable" pitchFamily="34" charset="-122"/>
+                <a:cs typeface="Pretendard Variable" pitchFamily="34" charset="-120"/>
+              </a:rPr>
+              <a:t> (+384 박스)</a:t>
             </a:r>
             <a:endParaRPr lang="en-US" sz="1100" dirty="0"/>
           </a:p>
@@ -28595,7 +28660,7 @@
                 <a:ea typeface="Pretendard Variable" pitchFamily="34" charset="-122"/>
                 <a:cs typeface="Pretendard Variable" pitchFamily="34" charset="-120"/>
               </a:rPr>
-              <a:t>4.2</a:t>
+              <a:t>4.0</a:t>
             </a:r>
             <a:r>
               <a:rPr lang="en-US" sz="1600" b="1" kern="0" spc="-75" dirty="0">
@@ -28645,7 +28710,7 @@
                 <a:ea typeface="Pretendard Variable" pitchFamily="34" charset="-122"/>
                 <a:cs typeface="Pretendard Variable" pitchFamily="34" charset="-120"/>
               </a:rPr>
-              <a:t>▲ +2.4/hr · ×2.6</a:t>
+              <a:t>▲ +2.4/hr · ×2.5</a:t>
             </a:r>
             <a:endParaRPr lang="en-US" sz="1500" dirty="0"/>
           </a:p>
@@ -28784,7 +28849,7 @@
                 <a:ea typeface="Pretendard Variable" pitchFamily="34" charset="-122"/>
                 <a:cs typeface="Pretendard Variable" pitchFamily="34" charset="-120"/>
               </a:rPr>
-              <a:t>3/60</a:t>
+              <a:t>4/60</a:t>
             </a:r>
             <a:endParaRPr lang="en-US" sz="3300" dirty="0"/>
           </a:p>
@@ -28823,7 +28888,7 @@
                 <a:ea typeface="Pretendard Variable" pitchFamily="34" charset="-122"/>
                 <a:cs typeface="Pretendard Variable" pitchFamily="34" charset="-120"/>
               </a:rPr>
-              <a:t>×3배 · AGV 40→25대</a:t>
+              <a:t>×4배 · AGV 40→25대</a:t>
             </a:r>
             <a:endParaRPr lang="en-US" sz="1500" dirty="0"/>
           </a:p>
@@ -28862,7 +28927,29 @@
                 <a:ea typeface="Pretendard Variable" pitchFamily="34" charset="-122"/>
                 <a:cs typeface="Pretendard Variable" pitchFamily="34" charset="-120"/>
               </a:rPr>
-              <a:t>더 적은 자원으로 </a:t>
+              <a:t>더 적은 </a:t>
+            </a:r>
+            <a:r>
+              <a:rPr lang="en-US" sz="1100" dirty="0" err="1">
+                <a:solidFill>
+                  <a:srgbClr val="3A4356"/>
+                </a:solidFill>
+                <a:latin typeface="Pretendard Variable" pitchFamily="34" charset="0"/>
+                <a:ea typeface="Pretendard Variable" pitchFamily="34" charset="-122"/>
+                <a:cs typeface="Pretendard Variable" pitchFamily="34" charset="-120"/>
+              </a:rPr>
+              <a:t>자원으로</a:t>
+            </a:r>
+            <a:r>
+              <a:rPr lang="en-US" sz="1100" dirty="0">
+                <a:solidFill>
+                  <a:srgbClr val="3A4356"/>
+                </a:solidFill>
+                <a:latin typeface="Pretendard Variable" pitchFamily="34" charset="0"/>
+                <a:ea typeface="Pretendard Variable" pitchFamily="34" charset="-122"/>
+                <a:cs typeface="Pretendard Variable" pitchFamily="34" charset="-120"/>
+              </a:rPr>
+              <a:t> </a:t>
             </a:r>
             <a:r>
               <a:rPr lang="en-US" sz="1100" b="1" dirty="0">
@@ -28873,7 +28960,7 @@
                 <a:ea typeface="Pretendard Variable" pitchFamily="34" charset="-122"/>
                 <a:cs typeface="Pretendard Variable" pitchFamily="34" charset="-120"/>
               </a:rPr>
-              <a:t>3배 지점</a:t>
+              <a:t>4배 지점</a:t>
             </a:r>
             <a:r>
               <a:rPr lang="en-US" sz="1100" dirty="0">
@@ -29118,7 +29205,7 @@
                 <a:ea typeface="Pretendard Variable" pitchFamily="34" charset="-122"/>
                 <a:cs typeface="Pretendard Variable" pitchFamily="34" charset="-120"/>
               </a:rPr>
-              <a:t>25대 · 7.6%</a:t>
+              <a:t>25대 · 7.2%</a:t>
             </a:r>
             <a:endParaRPr lang="en-US" sz="900" dirty="0"/>
           </a:p>
@@ -29157,7 +29244,29 @@
                 <a:ea typeface="Pretendard Variable" pitchFamily="34" charset="-122"/>
                 <a:cs typeface="Pretendard Variable" pitchFamily="34" charset="-120"/>
               </a:rPr>
-              <a:t>672 박스 (+416)</a:t>
+              <a:t>640 </a:t>
+            </a:r>
+            <a:r>
+              <a:rPr lang="en-US" sz="1100" b="1" dirty="0" err="1">
+                <a:solidFill>
+                  <a:srgbClr val="2E7D32"/>
+                </a:solidFill>
+                <a:latin typeface="Pretendard Variable" pitchFamily="34" charset="0"/>
+                <a:ea typeface="Pretendard Variable" pitchFamily="34" charset="-122"/>
+                <a:cs typeface="Pretendard Variable" pitchFamily="34" charset="-120"/>
+              </a:rPr>
+              <a:t>박스</a:t>
+            </a:r>
+            <a:r>
+              <a:rPr lang="en-US" sz="1100" b="1" dirty="0">
+                <a:solidFill>
+                  <a:srgbClr val="2E7D32"/>
+                </a:solidFill>
+                <a:latin typeface="Pretendard Variable" pitchFamily="34" charset="0"/>
+                <a:ea typeface="Pretendard Variable" pitchFamily="34" charset="-122"/>
+                <a:cs typeface="Pretendard Variable" pitchFamily="34" charset="-120"/>
+              </a:rPr>
+              <a:t> (+384)</a:t>
             </a:r>
             <a:endParaRPr lang="en-US" sz="1100" dirty="0"/>
           </a:p>
@@ -29211,7 +29320,7 @@
           <p:nvPr>
             <p:extLst>
               <p:ext uri="{D42A27DB-BD31-4B8C-83A1-F6EECF244321}">
-                <p14:modId xmlns:p14="http://schemas.microsoft.com/office/powerpoint/2010/main" val="2487067669"/>
+                <p14:modId xmlns:p14="http://schemas.microsoft.com/office/powerpoint/2010/main" val="751159418"/>
               </p:ext>
             </p:extLst>
           </p:nvPr>
@@ -29687,7 +29796,7 @@
                           <a:ea typeface="Pretendard Variable" pitchFamily="34" charset="-122"/>
                           <a:cs typeface="Pretendard Variable" pitchFamily="34" charset="-120"/>
                         </a:rPr>
-                        <a:t>21 팔레트</a:t>
+                        <a:t>20 팔레트</a:t>
                       </a:r>
                       <a:endParaRPr lang="en-US" sz="1125" dirty="0">
                         <a:latin typeface="Pretendard Variable" charset="0"/>
@@ -29755,7 +29864,7 @@
                           <a:ea typeface="Pretendard Variable" pitchFamily="34" charset="-122"/>
                           <a:cs typeface="Pretendard Variable" pitchFamily="34" charset="-120"/>
                         </a:rPr>
-                        <a:t>▲ +162% (×2.6)</a:t>
+                        <a:t>▲ +150% (×2.5)</a:t>
                       </a:r>
                       <a:endParaRPr lang="en-US" sz="1125" dirty="0">
                         <a:latin typeface="Pretendard Variable" charset="0"/>
@@ -29966,7 +30075,7 @@
                           <a:ea typeface="Pretendard Variable" pitchFamily="34" charset="-122"/>
                           <a:cs typeface="Pretendard Variable" pitchFamily="34" charset="-120"/>
                         </a:rPr>
-                        <a:t>672 박스</a:t>
+                        <a:t>640 박스</a:t>
                       </a:r>
                       <a:endParaRPr lang="en-US" sz="1125" dirty="0">
                         <a:latin typeface="Pretendard Variable" charset="0"/>
@@ -30034,7 +30143,7 @@
                           <a:ea typeface="Pretendard Variable" pitchFamily="34" charset="-122"/>
                           <a:cs typeface="Pretendard Variable" pitchFamily="34" charset="-120"/>
                         </a:rPr>
-                        <a:t>▲ +416 박스</a:t>
+                        <a:t>▲ +384 박스</a:t>
                       </a:r>
                       <a:endParaRPr lang="en-US" sz="1125" dirty="0">
                         <a:latin typeface="Pretendard Variable" charset="0"/>
@@ -30245,7 +30354,7 @@
                           <a:ea typeface="Pretendard Variable" pitchFamily="34" charset="-122"/>
                           <a:cs typeface="Pretendard Variable" pitchFamily="34" charset="-120"/>
                         </a:rPr>
-                        <a:t>3 / 60</a:t>
+                        <a:t>4 / 60</a:t>
                       </a:r>
                       <a:endParaRPr lang="en-US" sz="1125" dirty="0">
                         <a:latin typeface="Pretendard Variable" charset="0"/>
@@ -30313,7 +30422,7 @@
                           <a:ea typeface="Pretendard Variable" pitchFamily="34" charset="-122"/>
                           <a:cs typeface="Pretendard Variable" pitchFamily="34" charset="-120"/>
                         </a:rPr>
-                        <a:t>×3 배</a:t>
+                        <a:t>×4 배</a:t>
                       </a:r>
                       <a:endParaRPr lang="en-US" sz="1125" dirty="0">
                         <a:latin typeface="Pretendard Variable" charset="0"/>
@@ -30546,7 +30655,7 @@
                           <a:ea typeface="Pretendard Variable" pitchFamily="34" charset="-122"/>
                           <a:cs typeface="Pretendard Variable" pitchFamily="34" charset="-120"/>
                         </a:rPr>
-                        <a:t>4.2 팔레트/hr</a:t>
+                        <a:t>4.0 팔레트/hr</a:t>
                       </a:r>
                       <a:endParaRPr lang="en-US" sz="1125" dirty="0">
                         <a:latin typeface="Pretendard Variable" charset="0"/>

--- a/피킹_프로세스_효율화_및_생산성_극대화_20260709235709.pptx
+++ b/피킹_프로세스_효율화_및_생산성_극대화_20260709235709.pptx
@@ -3032,7 +3032,7 @@
                 <a:ea typeface="Pretendard Variable" pitchFamily="34" charset="-122"/>
                 <a:cs typeface="Pretendard Variable" pitchFamily="34" charset="-120"/>
               </a:rPr>
-              <a:t>25대가 처리량 - 혼잡의 최적 균형점이다</a:t>
+              <a:t>15~35대 구간 처리량 동일 · 하류 공정이 병목</a:t>
             </a:r>
             <a:endParaRPr lang="en-US" sz="2200" dirty="0"/>
           </a:p>
@@ -3071,7 +3071,7 @@
                 <a:ea typeface="Pretendard Variable" pitchFamily="34" charset="-122"/>
                 <a:cs typeface="Pretendard Variable" pitchFamily="34" charset="-120"/>
               </a:rPr>
-              <a:t>AGV 15 / 20 / 25 / 35 대 수준을 실험하여 성능 곡선을 확인하였다. 대수가 지나치게 많으면 동선 충돌 · 대기가 늘어 오히려 정체되며, 너무 적으면 박스 수령 지연이 발생한다.</a:t>
+              <a:t>AGV 15 / 20 / 25 / 35 대 4수준을 실험하였다. 제함기 capacity=1 · 안정화 패치 적용 후, 5시간 완료 팔레트는 4수준 모두 20개(640박스)로 동일하였다. AGV 가동률만 대수에 따라 달라지며, 처리량 병목은 파렛타이저·슬롯 등 하류 공정에 있다.</a:t>
             </a:r>
             <a:endParaRPr lang="en-US" sz="1500" dirty="0"/>
           </a:p>
@@ -3569,7 +3569,7 @@
                           <a:ea typeface="Pretendard Variable" pitchFamily="34" charset="-122"/>
                           <a:cs typeface="Pretendard Variable" pitchFamily="34" charset="-120"/>
                         </a:rPr>
-                        <a:t>14 팔레트</a:t>
+                        <a:t>20 팔레트</a:t>
                       </a:r>
                       <a:endParaRPr lang="en-US" sz="1275" dirty="0">
                         <a:latin typeface="Pretendard Variable" charset="0"/>
@@ -3637,7 +3637,7 @@
                           <a:ea typeface="Pretendard Variable" pitchFamily="34" charset="-122"/>
                           <a:cs typeface="Pretendard Variable" pitchFamily="34" charset="-120"/>
                         </a:rPr>
-                        <a:t>2.8 팔레트/hr</a:t>
+                        <a:t>4.0 팔레트/hr</a:t>
                       </a:r>
                       <a:endParaRPr lang="en-US" sz="1275" dirty="0">
                         <a:latin typeface="Pretendard Variable" charset="0"/>
@@ -3705,7 +3705,7 @@
                           <a:ea typeface="Pretendard Variable" pitchFamily="34" charset="-122"/>
                           <a:cs typeface="Pretendard Variable" pitchFamily="34" charset="-120"/>
                         </a:rPr>
-                        <a:t>약 80%</a:t>
+                        <a:t>60.0%</a:t>
                       </a:r>
                       <a:endParaRPr lang="en-US" sz="1275" dirty="0">
                         <a:latin typeface="Pretendard Variable" charset="0"/>
@@ -3773,7 +3773,7 @@
                           <a:ea typeface="Pretendard Variable" pitchFamily="34" charset="-122"/>
                           <a:cs typeface="Pretendard Variable" pitchFamily="34" charset="-120"/>
                         </a:rPr>
-                        <a:t>후반 교착 · 운영 불가</a:t>
+                        <a:t>처리량 동일 · 가동률 높음</a:t>
                       </a:r>
                       <a:endParaRPr lang="en-US" sz="1275" dirty="0">
                         <a:latin typeface="Pretendard Variable" charset="0"/>
@@ -3916,7 +3916,7 @@
                           <a:ea typeface="Pretendard Variable" pitchFamily="34" charset="-122"/>
                           <a:cs typeface="Pretendard Variable" pitchFamily="34" charset="-120"/>
                         </a:rPr>
-                        <a:t>8 팔레트</a:t>
+                        <a:t>20 팔레트</a:t>
                       </a:r>
                       <a:endParaRPr lang="en-US" sz="1275" dirty="0">
                         <a:latin typeface="Pretendard Variable" charset="0"/>
@@ -3984,7 +3984,7 @@
                           <a:ea typeface="Pretendard Variable" pitchFamily="34" charset="-122"/>
                           <a:cs typeface="Pretendard Variable" pitchFamily="34" charset="-120"/>
                         </a:rPr>
-                        <a:t>1.6 팔레트/hr</a:t>
+                        <a:t>4.0 팔레트/hr</a:t>
                       </a:r>
                       <a:endParaRPr lang="en-US" sz="1275" dirty="0">
                         <a:latin typeface="Pretendard Variable" charset="0"/>
@@ -4052,7 +4052,7 @@
                           <a:ea typeface="Pretendard Variable" pitchFamily="34" charset="-122"/>
                           <a:cs typeface="Pretendard Variable" pitchFamily="34" charset="-120"/>
                         </a:rPr>
-                        <a:t>약 35%</a:t>
+                        <a:t>50.0%</a:t>
                       </a:r>
                       <a:endParaRPr lang="en-US" sz="1275" dirty="0">
                         <a:latin typeface="Pretendard Variable" charset="0"/>
@@ -4120,7 +4120,7 @@
                           <a:ea typeface="Pretendard Variable" pitchFamily="34" charset="-122"/>
                           <a:cs typeface="Pretendard Variable" pitchFamily="34" charset="-120"/>
                         </a:rPr>
-                        <a:t>1/3 지점 교착 · 운영 불가</a:t>
+                        <a:t>처리량 동일</a:t>
                       </a:r>
                       <a:endParaRPr lang="en-US" sz="1275" dirty="0">
                         <a:latin typeface="Pretendard Variable" charset="0"/>
@@ -4395,7 +4395,7 @@
                           <a:ea typeface="Pretendard Variable" pitchFamily="34" charset="-122"/>
                           <a:cs typeface="Pretendard Variable" pitchFamily="34" charset="-120"/>
                         </a:rPr>
-                        <a:t>약 50%</a:t>
+                        <a:t>50.0%</a:t>
                       </a:r>
                       <a:endParaRPr lang="en-US" sz="1275" dirty="0">
                         <a:latin typeface="Pretendard Variable" charset="0"/>
@@ -4463,7 +4463,7 @@
                           <a:ea typeface="Pretendard Variable" pitchFamily="34" charset="-122"/>
                           <a:cs typeface="Pretendard Variable" pitchFamily="34" charset="-120"/>
                         </a:rPr>
-                        <a:t>정상 · 기준 시나리오</a:t>
+                        <a:t>기준 시나리오 · AS-IS 대비</a:t>
                       </a:r>
                       <a:endParaRPr lang="en-US" sz="1200" dirty="0"/>
                     </a:p>
@@ -4602,7 +4602,7 @@
                           <a:ea typeface="Pretendard Variable" pitchFamily="34" charset="-122"/>
                           <a:cs typeface="Pretendard Variable" pitchFamily="34" charset="-120"/>
                         </a:rPr>
-                        <a:t>2 팔레트</a:t>
+                        <a:t>20 팔레트</a:t>
                       </a:r>
                       <a:endParaRPr lang="en-US" sz="1275" dirty="0">
                         <a:latin typeface="Pretendard Variable" charset="0"/>
@@ -4670,7 +4670,7 @@
                           <a:ea typeface="Pretendard Variable" pitchFamily="34" charset="-122"/>
                           <a:cs typeface="Pretendard Variable" pitchFamily="34" charset="-120"/>
                         </a:rPr>
-                        <a:t>0.4 팔레트/hr</a:t>
+                        <a:t>4.0 팔레트/hr</a:t>
                       </a:r>
                       <a:endParaRPr lang="en-US" sz="1275" dirty="0">
                         <a:latin typeface="Pretendard Variable" charset="0"/>
@@ -4738,7 +4738,7 @@
                           <a:ea typeface="Pretendard Variable" pitchFamily="34" charset="-122"/>
                           <a:cs typeface="Pretendard Variable" pitchFamily="34" charset="-120"/>
                         </a:rPr>
-                        <a:t>약 30%</a:t>
+                        <a:t>34.3%</a:t>
                       </a:r>
                       <a:endParaRPr lang="en-US" sz="1275" dirty="0">
                         <a:latin typeface="Pretendard Variable" charset="0"/>
@@ -4806,7 +4806,7 @@
                           <a:ea typeface="Pretendard Variable" pitchFamily="34" charset="-122"/>
                           <a:cs typeface="Pretendard Variable" pitchFamily="34" charset="-120"/>
                         </a:rPr>
-                        <a:t>초반 교착 · 운영 불가</a:t>
+                        <a:t>처리량 동일 · 교착 없음</a:t>
                       </a:r>
                       <a:endParaRPr lang="en-US" sz="1275" dirty="0">
                         <a:latin typeface="Pretendard Variable" charset="0"/>
@@ -4978,7 +4978,7 @@
                 <a:ea typeface="Pretendard Variable" pitchFamily="34" charset="-122"/>
                 <a:cs typeface="Pretendard Variable" pitchFamily="34" charset="-120"/>
               </a:rPr>
-              <a:t>14 팔레트 · 후반 교착</a:t>
+              <a:t>20 팔레트 · 가동률 60.0%</a:t>
             </a:r>
             <a:endParaRPr lang="en-US" sz="1100" dirty="0"/>
           </a:p>
@@ -5056,7 +5056,7 @@
                 <a:ea typeface="Pretendard Variable" pitchFamily="34" charset="-122"/>
                 <a:cs typeface="Pretendard Variable" pitchFamily="34" charset="-120"/>
               </a:rPr>
-              <a:t>8 팔레트 · 1/3 교착</a:t>
+              <a:t>20 팔레트 · 가동률 50.0%</a:t>
             </a:r>
             <a:endParaRPr lang="en-US" sz="1100" dirty="0"/>
           </a:p>
@@ -5134,7 +5134,7 @@
                 <a:ea typeface="Pretendard Variable" pitchFamily="34" charset="-122"/>
                 <a:cs typeface="Pretendard Variable" pitchFamily="34" charset="-120"/>
               </a:rPr>
-              <a:t>20 팔레트 · 정상 · 기준</a:t>
+              <a:t>20 팔레트 · 기준 시나리오</a:t>
             </a:r>
             <a:endParaRPr lang="en-US" sz="1100" dirty="0"/>
           </a:p>
@@ -5212,7 +5212,7 @@
                 <a:ea typeface="Pretendard Variable" pitchFamily="34" charset="-122"/>
                 <a:cs typeface="Pretendard Variable" pitchFamily="34" charset="-120"/>
               </a:rPr>
-              <a:t>2 팔레트 · 초반 교착</a:t>
+              <a:t>20 팔레트 · 가동률 34.3%</a:t>
             </a:r>
             <a:endParaRPr lang="en-US" sz="1100" dirty="0"/>
           </a:p>
@@ -5251,7 +5251,7 @@
                 <a:ea typeface="Pretendard Variable" pitchFamily="34" charset="-122"/>
                 <a:cs typeface="Pretendard Variable" pitchFamily="34" charset="-120"/>
               </a:rPr>
-              <a:t>Takeaway. 15·20·35대는 교착으로 무진행 구간이 생기고, 25대만 5시간 끝까지 정상 운영되며 처리량·가동률의 실용 최적점이다.</a:t>
+              <a:t>Takeaway. 15~35대 모두 5시간 20팔레트(640박스)로 동일하다. AGV 대수는 처리량보다 가동률·운영비에 영향을 주므로, 동일 성능에서 최소 투입(15대)을 경제적 대안으로 검토할 수 있다.</a:t>
             </a:r>
             <a:endParaRPr lang="en-US" sz="1400" dirty="0"/>
           </a:p>
@@ -5955,84 +5955,7 @@
                 <a:ea typeface="Pretendard Variable" pitchFamily="34" charset="-122"/>
                 <a:cs typeface="Pretendard Variable" pitchFamily="34" charset="-120"/>
               </a:rPr>
-              <a:t>핵심 병목은 S/A 박스 91.7% (DB) · 이론 75%를 제함기 1이 단독으로 처리하는 라우팅 로직에 있었다. TO-BE 모델은 세 </a:t>
-            </a:r>
-            <a:r>
-              <a:rPr lang="en-US" sz="1500" dirty="0" err="1">
-                <a:solidFill>
-                  <a:srgbClr val="3A4356"/>
-                </a:solidFill>
-                <a:latin typeface="Pretendard Variable" pitchFamily="34" charset="0"/>
-                <a:ea typeface="Pretendard Variable" pitchFamily="34" charset="-122"/>
-                <a:cs typeface="Pretendard Variable" pitchFamily="34" charset="-120"/>
-              </a:rPr>
-              <a:t>가지</a:t>
-            </a:r>
-            <a:r>
-              <a:rPr lang="en-US" sz="1500" dirty="0">
-                <a:solidFill>
-                  <a:srgbClr val="3A4356"/>
-                </a:solidFill>
-                <a:latin typeface="Pretendard Variable" pitchFamily="34" charset="0"/>
-                <a:ea typeface="Pretendard Variable" pitchFamily="34" charset="-122"/>
-                <a:cs typeface="Pretendard Variable" pitchFamily="34" charset="-120"/>
-              </a:rPr>
-              <a:t> </a:t>
-            </a:r>
-            <a:r>
-              <a:rPr lang="ko-KR" altLang="en-US" sz="1500" dirty="0">
-                <a:solidFill>
-                  <a:srgbClr val="3A4356"/>
-                </a:solidFill>
-                <a:latin typeface="Pretendard Variable" pitchFamily="34" charset="0"/>
-                <a:ea typeface="Pretendard Variable" pitchFamily="34" charset="-122"/>
-                <a:cs typeface="Pretendard Variable" pitchFamily="34" charset="-120"/>
-              </a:rPr>
-              <a:t>운영 </a:t>
-            </a:r>
-            <a:r>
-              <a:rPr lang="en-US" sz="1500" dirty="0" err="1">
-                <a:solidFill>
-                  <a:srgbClr val="3A4356"/>
-                </a:solidFill>
-                <a:latin typeface="Pretendard Variable" pitchFamily="34" charset="0"/>
-                <a:ea typeface="Pretendard Variable" pitchFamily="34" charset="-122"/>
-                <a:cs typeface="Pretendard Variable" pitchFamily="34" charset="-120"/>
-              </a:rPr>
-              <a:t>개선</a:t>
-            </a:r>
-            <a:r>
-              <a:rPr lang="en-US" sz="1500" dirty="0">
-                <a:solidFill>
-                  <a:srgbClr val="3A4356"/>
-                </a:solidFill>
-                <a:latin typeface="Pretendard Variable" pitchFamily="34" charset="0"/>
-                <a:ea typeface="Pretendard Variable" pitchFamily="34" charset="-122"/>
-                <a:cs typeface="Pretendard Variable" pitchFamily="34" charset="-120"/>
-              </a:rPr>
-              <a:t> + </a:t>
-            </a:r>
-            <a:r>
-              <a:rPr lang="ko-KR" altLang="en-US" sz="1500" dirty="0">
-                <a:solidFill>
-                  <a:srgbClr val="3A4356"/>
-                </a:solidFill>
-                <a:latin typeface="Pretendard Variable" pitchFamily="34" charset="0"/>
-                <a:ea typeface="Pretendard Variable" pitchFamily="34" charset="-122"/>
-                <a:cs typeface="Pretendard Variable" pitchFamily="34" charset="-120"/>
-              </a:rPr>
-              <a:t>안정화를</a:t>
-            </a:r>
-            <a:r>
-              <a:rPr lang="en-US" sz="1500" dirty="0">
-                <a:solidFill>
-                  <a:srgbClr val="3A4356"/>
-                </a:solidFill>
-                <a:latin typeface="Pretendard Variable" pitchFamily="34" charset="0"/>
-                <a:ea typeface="Pretendard Variable" pitchFamily="34" charset="-122"/>
-                <a:cs typeface="Pretendard Variable" pitchFamily="34" charset="-120"/>
-              </a:rPr>
-              <a:t> 통해 이 구조를 해소하고 처리량을 유의미하게 향상시켰다.</a:t>
+              <a:t>핵심 병목은 S/A 박스 91.7% (DB)를 제함기 1이 단독으로 처리하는 라우팅 로직에 있었다. TO-BE 모델은 세 가지 운영 개선 + 안정화를 통해 이 구조를 해소하고 처리량을 유의미하게 향상시켰다.</a:t>
             </a:r>
             <a:endParaRPr lang="en-US" sz="1500" dirty="0"/>
           </a:p>
@@ -6152,29 +6075,7 @@
                 <a:ea typeface="Pretendard Variable" pitchFamily="34" charset="-122"/>
                 <a:cs typeface="Pretendard Variable" pitchFamily="34" charset="-120"/>
               </a:rPr>
-              <a:t>selectOutput1 조건 </a:t>
-            </a:r>
-            <a:r>
-              <a:rPr lang="en-US" sz="1100" b="1" dirty="0">
-                <a:solidFill>
-                  <a:srgbClr val="1A1F2E"/>
-                </a:solidFill>
-                <a:latin typeface="Pretendard Variable" pitchFamily="34" charset="0"/>
-                <a:ea typeface="Pretendard Variable" pitchFamily="34" charset="-122"/>
-                <a:cs typeface="Pretendard Variable" pitchFamily="34" charset="-120"/>
-              </a:rPr>
-              <a:t>1줄 추가</a:t>
-            </a:r>
-            <a:r>
-              <a:rPr lang="en-US" sz="1100" dirty="0">
-                <a:solidFill>
-                  <a:srgbClr val="3A4356"/>
-                </a:solidFill>
-                <a:latin typeface="Pretendard Variable" pitchFamily="34" charset="0"/>
-                <a:ea typeface="Pretendard Variable" pitchFamily="34" charset="-122"/>
-                <a:cs typeface="Pretendard Variable" pitchFamily="34" charset="-120"/>
-              </a:rPr>
-              <a:t>만으로 구현 가능한 가장 단순하고 효과가 큰 개선.</a:t>
+              <a:t>selectOutput1 조건 1줄 추가만으로 구현 가능한 Zero-Cost 개선.</a:t>
             </a:r>
             <a:endParaRPr lang="en-US" sz="1100" dirty="0"/>
           </a:p>
@@ -6194,7 +6095,7 @@
                 <a:ea typeface="Pretendard Variable" pitchFamily="34" charset="-122"/>
                 <a:cs typeface="Pretendard Variable" pitchFamily="34" charset="-120"/>
               </a:rPr>
-              <a:t>추가 설비 없이 기존 제함기 2의 유휴 용량을 즉시 활용.</a:t>
+              <a:t>실측 기여는 제한적(제함기2 4.8%)이나 하류 병목 해소 시 효과가 커지는 구조적 대비책.</a:t>
             </a:r>
             <a:endParaRPr lang="en-US" sz="1100" dirty="0"/>
           </a:p>
@@ -6236,40 +6137,7 @@
                 <a:ea typeface="Pretendard Variable" pitchFamily="34" charset="-122"/>
                 <a:cs typeface="Pretendard Variable" pitchFamily="34" charset="-120"/>
               </a:rPr>
-              <a:t>제함기 1 </a:t>
-            </a:r>
-            <a:r>
-              <a:rPr lang="en-US" sz="1100" b="1" dirty="0">
-                <a:solidFill>
-                  <a:srgbClr val="C0392B"/>
-                </a:solidFill>
-                <a:latin typeface="Pretendard Variable" pitchFamily="34" charset="0"/>
-                <a:ea typeface="Pretendard Variable" pitchFamily="34" charset="-122"/>
-                <a:cs typeface="Pretendard Variable" pitchFamily="34" charset="-120"/>
-              </a:rPr>
-              <a:t>100%</a:t>
-            </a:r>
-            <a:r>
-              <a:rPr lang="en-US" sz="1100" dirty="0">
-                <a:solidFill>
-                  <a:srgbClr val="1A1F2E"/>
-                </a:solidFill>
-                <a:latin typeface="Pretendard Variable" pitchFamily="34" charset="0"/>
-                <a:ea typeface="Pretendard Variable" pitchFamily="34" charset="-122"/>
-                <a:cs typeface="Pretendard Variable" pitchFamily="34" charset="-120"/>
-              </a:rPr>
-              <a:t> → </a:t>
-            </a:r>
-            <a:r>
-              <a:rPr lang="en-US" sz="1100" b="1" dirty="0">
-                <a:solidFill>
-                  <a:srgbClr val="2E7D32"/>
-                </a:solidFill>
-                <a:latin typeface="Pretendard Variable" pitchFamily="34" charset="0"/>
-                <a:ea typeface="Pretendard Variable" pitchFamily="34" charset="-122"/>
-                <a:cs typeface="Pretendard Variable" pitchFamily="34" charset="-120"/>
-              </a:rPr>
-              <a:t>약 30%</a:t>
+              <a:t>제함기 2 0% → 4.8% 활성화</a:t>
             </a:r>
             <a:endParaRPr lang="en-US" sz="1100" dirty="0"/>
           </a:p>
@@ -6289,40 +6157,7 @@
                 <a:ea typeface="Pretendard Variable" pitchFamily="34" charset="-122"/>
                 <a:cs typeface="Pretendard Variable" pitchFamily="34" charset="-120"/>
               </a:rPr>
-              <a:t>제함기 2 </a:t>
-            </a:r>
-            <a:r>
-              <a:rPr lang="en-US" sz="1100" b="1" dirty="0">
-                <a:solidFill>
-                  <a:srgbClr val="C0392B"/>
-                </a:solidFill>
-                <a:latin typeface="Pretendard Variable" pitchFamily="34" charset="0"/>
-                <a:ea typeface="Pretendard Variable" pitchFamily="34" charset="-122"/>
-                <a:cs typeface="Pretendard Variable" pitchFamily="34" charset="-120"/>
-              </a:rPr>
-              <a:t>0%</a:t>
-            </a:r>
-            <a:r>
-              <a:rPr lang="en-US" sz="1100" dirty="0">
-                <a:solidFill>
-                  <a:srgbClr val="1A1F2E"/>
-                </a:solidFill>
-                <a:latin typeface="Pretendard Variable" pitchFamily="34" charset="0"/>
-                <a:ea typeface="Pretendard Variable" pitchFamily="34" charset="-122"/>
-                <a:cs typeface="Pretendard Variable" pitchFamily="34" charset="-120"/>
-              </a:rPr>
-              <a:t> → </a:t>
-            </a:r>
-            <a:r>
-              <a:rPr lang="en-US" sz="1100" b="1" dirty="0">
-                <a:solidFill>
-                  <a:srgbClr val="2E7D32"/>
-                </a:solidFill>
-                <a:latin typeface="Pretendard Variable" pitchFamily="34" charset="0"/>
-                <a:ea typeface="Pretendard Variable" pitchFamily="34" charset="-122"/>
-                <a:cs typeface="Pretendard Variable" pitchFamily="34" charset="-120"/>
-              </a:rPr>
-              <a:t>약 70%</a:t>
+              <a:t>제함기 1 100% (하류 정체 지속)</a:t>
             </a:r>
             <a:endParaRPr lang="en-US" sz="1100" dirty="0"/>
           </a:p>
@@ -6439,29 +6274,7 @@
                 <a:ea typeface="Pretendard Variable" pitchFamily="34" charset="-122"/>
                 <a:cs typeface="Pretendard Variable" pitchFamily="34" charset="-120"/>
               </a:rPr>
-              <a:t>25대 운영은 40대 대비 </a:t>
-            </a:r>
-            <a:r>
-              <a:rPr lang="en-US" sz="1100" b="1" dirty="0">
-                <a:solidFill>
-                  <a:srgbClr val="1A1F2E"/>
-                </a:solidFill>
-                <a:latin typeface="Pretendard Variable" pitchFamily="34" charset="0"/>
-                <a:ea typeface="Pretendard Variable" pitchFamily="34" charset="-122"/>
-                <a:cs typeface="Pretendard Variable" pitchFamily="34" charset="-120"/>
-              </a:rPr>
-              <a:t>운영 비용(유지보수 · 충전) 절감</a:t>
-            </a:r>
-            <a:r>
-              <a:rPr lang="en-US" sz="1100" dirty="0">
-                <a:solidFill>
-                  <a:srgbClr val="3A4356"/>
-                </a:solidFill>
-                <a:latin typeface="Pretendard Variable" pitchFamily="34" charset="0"/>
-                <a:ea typeface="Pretendard Variable" pitchFamily="34" charset="-122"/>
-                <a:cs typeface="Pretendard Variable" pitchFamily="34" charset="-120"/>
-              </a:rPr>
-              <a:t>과 처리량 향상 동시 달성. 최근접 배차는 파라미터 1개 변경으로 즉시 적용.</a:t>
+              <a:t>40→25대 축소로 운영 비용(유지보수 · 충전)을 절감하면서 처리량을 향상. 민감도 실험상 15~35대 처리량은 동일. 최근접 배차는 파라미터 1개 변경으로 즉시 적용.</a:t>
             </a:r>
             <a:endParaRPr lang="en-US" sz="1100" dirty="0"/>
           </a:p>
@@ -6704,7 +6517,7 @@
                 <a:ea typeface="Pretendard Variable" pitchFamily="34" charset="-122"/>
                 <a:cs typeface="Pretendard Variable" pitchFamily="34" charset="-120"/>
               </a:rPr>
-              <a:t>완료 지점 1 → 4 (5hr)</a:t>
+              <a:t>완료 지점 1 → 3 (5hr)</a:t>
             </a:r>
             <a:endParaRPr lang="en-US" sz="1100" dirty="0"/>
           </a:p>
@@ -8409,29 +8222,7 @@
                 <a:ea typeface="Pretendard Variable" pitchFamily="34" charset="-122"/>
                 <a:cs typeface="Pretendard Variable" pitchFamily="34" charset="-120"/>
               </a:rPr>
-              <a:t>100%</a:t>
-            </a:r>
-            <a:r>
-              <a:rPr lang="en-US" sz="1900" dirty="0">
-                <a:solidFill>
-                  <a:srgbClr val="6B7488"/>
-                </a:solidFill>
-                <a:latin typeface="Pretendard Variable" pitchFamily="34" charset="0"/>
-                <a:ea typeface="Pretendard Variable" pitchFamily="34" charset="-122"/>
-                <a:cs typeface="Pretendard Variable" pitchFamily="34" charset="-120"/>
-              </a:rPr>
-              <a:t>→</a:t>
-            </a:r>
-            <a:r>
-              <a:rPr lang="en-US" sz="2400" b="1" dirty="0">
-                <a:solidFill>
-                  <a:srgbClr val="2E7D32"/>
-                </a:solidFill>
-                <a:latin typeface="Pretendard Variable" pitchFamily="34" charset="0"/>
-                <a:ea typeface="Pretendard Variable" pitchFamily="34" charset="-122"/>
-                <a:cs typeface="Pretendard Variable" pitchFamily="34" charset="-120"/>
-              </a:rPr>
-              <a:t>약 30%</a:t>
+              <a:t>100% (정체 지속)</a:t>
             </a:r>
             <a:endParaRPr lang="en-US" sz="1200" dirty="0"/>
           </a:p>
@@ -8509,29 +8300,7 @@
                 <a:ea typeface="Pretendard Variable" pitchFamily="34" charset="-122"/>
                 <a:cs typeface="Pretendard Variable" pitchFamily="34" charset="-120"/>
               </a:rPr>
-              <a:t>0%</a:t>
-            </a:r>
-            <a:r>
-              <a:rPr lang="en-US" sz="1900" dirty="0">
-                <a:solidFill>
-                  <a:srgbClr val="6B7488"/>
-                </a:solidFill>
-                <a:latin typeface="Pretendard Variable" pitchFamily="34" charset="0"/>
-                <a:ea typeface="Pretendard Variable" pitchFamily="34" charset="-122"/>
-                <a:cs typeface="Pretendard Variable" pitchFamily="34" charset="-120"/>
-              </a:rPr>
-              <a:t>→</a:t>
-            </a:r>
-            <a:r>
-              <a:rPr lang="en-US" sz="2400" b="1" dirty="0">
-                <a:solidFill>
-                  <a:srgbClr val="2E7D32"/>
-                </a:solidFill>
-                <a:latin typeface="Pretendard Variable" pitchFamily="34" charset="0"/>
-                <a:ea typeface="Pretendard Variable" pitchFamily="34" charset="-122"/>
-                <a:cs typeface="Pretendard Variable" pitchFamily="34" charset="-120"/>
-              </a:rPr>
-              <a:t>약 70%</a:t>
+              <a:t>0% → 4.8%</a:t>
             </a:r>
             <a:endParaRPr lang="en-US" sz="1200" dirty="0"/>
           </a:p>
@@ -8570,7 +8339,7 @@
                 <a:ea typeface="Pretendard Variable" pitchFamily="34" charset="-122"/>
                 <a:cs typeface="Pretendard Variable" pitchFamily="34" charset="-120"/>
               </a:rPr>
-              <a:t>병목 해소 → 하류 공정 처리량 증가</a:t>
+              <a:t>하류 병목 해소 시 효과 확대</a:t>
             </a:r>
             <a:endParaRPr lang="en-US" sz="1100" dirty="0"/>
           </a:p>
@@ -8876,40 +8645,7 @@
                 <a:ea typeface="Pretendard Variable" pitchFamily="34" charset="-122"/>
                 <a:cs typeface="Pretendard Variable" pitchFamily="34" charset="-120"/>
               </a:rPr>
-              <a:t>23%</a:t>
-            </a:r>
-            <a:r>
-              <a:rPr lang="en-US" sz="1900" dirty="0">
-                <a:solidFill>
-                  <a:srgbClr val="6B7488"/>
-                </a:solidFill>
-                <a:latin typeface="Pretendard Variable" pitchFamily="34" charset="0"/>
-                <a:ea typeface="Pretendard Variable" pitchFamily="34" charset="-122"/>
-                <a:cs typeface="Pretendard Variable" pitchFamily="34" charset="-120"/>
-              </a:rPr>
-              <a:t>→</a:t>
-            </a:r>
-            <a:r>
-              <a:rPr lang="en-US" sz="2400" b="1" dirty="0">
-                <a:solidFill>
-                  <a:srgbClr val="2E7D32"/>
-                </a:solidFill>
-                <a:latin typeface="Pretendard Variable" pitchFamily="34" charset="0"/>
-                <a:ea typeface="Pretendard Variable" pitchFamily="34" charset="-122"/>
-                <a:cs typeface="Pretendard Variable" pitchFamily="34" charset="-120"/>
-              </a:rPr>
-              <a:t>50%</a:t>
-            </a:r>
-            <a:r>
-              <a:rPr lang="en-US" sz="1300" dirty="0">
-                <a:solidFill>
-                  <a:srgbClr val="6B7488"/>
-                </a:solidFill>
-                <a:latin typeface="Pretendard Variable" pitchFamily="34" charset="0"/>
-                <a:ea typeface="Pretendard Variable" pitchFamily="34" charset="-122"/>
-                <a:cs typeface="Pretendard Variable" pitchFamily="34" charset="-120"/>
-              </a:rPr>
-              <a:t>(×2.2)</a:t>
+              <a:t>23%→50%(×2.2)</a:t>
             </a:r>
             <a:endParaRPr lang="en-US" sz="1200" dirty="0"/>
           </a:p>
@@ -9143,40 +8879,7 @@
                 <a:ea typeface="Pretendard Variable" pitchFamily="34" charset="-122"/>
                 <a:cs typeface="Pretendard Variable" pitchFamily="34" charset="-120"/>
               </a:rPr>
-              <a:t>1</a:t>
-            </a:r>
-            <a:r>
-              <a:rPr lang="en-US" sz="1900" dirty="0">
-                <a:solidFill>
-                  <a:srgbClr val="6B7488"/>
-                </a:solidFill>
-                <a:latin typeface="Pretendard Variable" pitchFamily="34" charset="0"/>
-                <a:ea typeface="Pretendard Variable" pitchFamily="34" charset="-122"/>
-                <a:cs typeface="Pretendard Variable" pitchFamily="34" charset="-120"/>
-              </a:rPr>
-              <a:t>→</a:t>
-            </a:r>
-            <a:r>
-              <a:rPr lang="en-US" sz="3100" b="1" dirty="0">
-                <a:solidFill>
-                  <a:srgbClr val="2E7D32"/>
-                </a:solidFill>
-                <a:latin typeface="Pretendard Variable" pitchFamily="34" charset="0"/>
-                <a:ea typeface="Pretendard Variable" pitchFamily="34" charset="-122"/>
-                <a:cs typeface="Pretendard Variable" pitchFamily="34" charset="-120"/>
-              </a:rPr>
-              <a:t>4</a:t>
-            </a:r>
-            <a:r>
-              <a:rPr lang="en-US" sz="1300" dirty="0">
-                <a:solidFill>
-                  <a:srgbClr val="6B7488"/>
-                </a:solidFill>
-                <a:latin typeface="Pretendard Variable" pitchFamily="34" charset="0"/>
-                <a:ea typeface="Pretendard Variable" pitchFamily="34" charset="-122"/>
-                <a:cs typeface="Pretendard Variable" pitchFamily="34" charset="-120"/>
-              </a:rPr>
-              <a:t>(×4 배)</a:t>
+              <a:t>1→3(×3 배)</a:t>
             </a:r>
             <a:endParaRPr lang="en-US" sz="1200" dirty="0"/>
           </a:p>
@@ -9398,39 +9101,7 @@
                 <a:ea typeface="Pretendard Variable" panose="02000003000000020004" pitchFamily="2" charset="-127"/>
                 <a:cs typeface="Pretendard Variable" panose="02000003000000020004" pitchFamily="2" charset="-127"/>
               </a:rPr>
-              <a:t>추가 설비 0원 · 핵심 전략 3가지 + 안정화 설정으로 처리량 +1</a:t>
-            </a:r>
-            <a:r>
-              <a:rPr lang="en-US" altLang="ko-KR" sz="1400" b="1" dirty="0">
-                <a:latin typeface="Pretendard Variable" panose="02000003000000020004" pitchFamily="2" charset="-127"/>
-                <a:ea typeface="Pretendard Variable" panose="02000003000000020004" pitchFamily="2" charset="-127"/>
-                <a:cs typeface="Pretendard Variable" panose="02000003000000020004" pitchFamily="2" charset="-127"/>
-              </a:rPr>
-              <a:t>50</a:t>
-            </a:r>
-            <a:r>
-              <a:rPr lang="ko-KR" altLang="ko-KR" sz="1400" b="1" dirty="0">
-                <a:latin typeface="Pretendard Variable" panose="02000003000000020004" pitchFamily="2" charset="-127"/>
-                <a:ea typeface="Pretendard Variable" panose="02000003000000020004" pitchFamily="2" charset="-127"/>
-                <a:cs typeface="Pretendard Variable" panose="02000003000000020004" pitchFamily="2" charset="-127"/>
-              </a:rPr>
-              <a:t>% · AGV −15대 · 완료 지점 ×</a:t>
-            </a:r>
-            <a:r>
-              <a:rPr lang="en-US" altLang="ko-KR" sz="1400" b="1" dirty="0">
-                <a:latin typeface="Pretendard Variable" panose="02000003000000020004" pitchFamily="2" charset="-127"/>
-                <a:ea typeface="Pretendard Variable" panose="02000003000000020004" pitchFamily="2" charset="-127"/>
-                <a:cs typeface="Pretendard Variable" panose="02000003000000020004" pitchFamily="2" charset="-127"/>
-              </a:rPr>
-              <a:t>4</a:t>
-            </a:r>
-            <a:r>
-              <a:rPr lang="ko-KR" altLang="ko-KR" sz="1400" b="1" dirty="0">
-                <a:latin typeface="Pretendard Variable" panose="02000003000000020004" pitchFamily="2" charset="-127"/>
-                <a:ea typeface="Pretendard Variable" panose="02000003000000020004" pitchFamily="2" charset="-127"/>
-                <a:cs typeface="Pretendard Variable" panose="02000003000000020004" pitchFamily="2" charset="-127"/>
-              </a:rPr>
-              <a:t>배</a:t>
+              <a:t>추가 설비 0원 · 핵심 전략 3가지 + 안정화 설정으로 처리량 +150% · AGV −15대 · 완료 지점 ×3배</a:t>
             </a:r>
             <a:endParaRPr lang="en-US" sz="1400" b="1" dirty="0">
               <a:latin typeface="Pretendard Variable" panose="02000003000000020004" pitchFamily="2" charset="-127"/>
@@ -10235,84 +9906,7 @@
                 <a:ea typeface="Pretendard Variable" pitchFamily="34" charset="-122"/>
                 <a:cs typeface="Pretendard Variable" pitchFamily="34" charset="-120"/>
               </a:rPr>
-              <a:t>→ 제함기 1 부하 </a:t>
-            </a:r>
-            <a:r>
-              <a:rPr lang="en-US" sz="1100" b="1" dirty="0">
-                <a:solidFill>
-                  <a:srgbClr val="C0392B"/>
-                </a:solidFill>
-                <a:latin typeface="Pretendard Variable" pitchFamily="34" charset="0"/>
-                <a:ea typeface="Pretendard Variable" pitchFamily="34" charset="-122"/>
-                <a:cs typeface="Pretendard Variable" pitchFamily="34" charset="-120"/>
-              </a:rPr>
-              <a:t>100%</a:t>
-            </a:r>
-            <a:r>
-              <a:rPr lang="en-US" sz="1100" dirty="0">
-                <a:solidFill>
-                  <a:srgbClr val="3A4356"/>
-                </a:solidFill>
-                <a:latin typeface="Pretendard Variable" pitchFamily="34" charset="0"/>
-                <a:ea typeface="Pretendard Variable" pitchFamily="34" charset="-122"/>
-                <a:cs typeface="Pretendard Variable" pitchFamily="34" charset="-120"/>
-              </a:rPr>
-              <a:t> → </a:t>
-            </a:r>
-            <a:r>
-              <a:rPr lang="en-US" sz="1100" b="1" dirty="0">
-                <a:solidFill>
-                  <a:srgbClr val="2E7D32"/>
-                </a:solidFill>
-                <a:latin typeface="Pretendard Variable" pitchFamily="34" charset="0"/>
-                <a:ea typeface="Pretendard Variable" pitchFamily="34" charset="-122"/>
-                <a:cs typeface="Pretendard Variable" pitchFamily="34" charset="-120"/>
-              </a:rPr>
-              <a:t>약 30%</a:t>
-            </a:r>
-            <a:r>
-              <a:rPr lang="en-US" sz="1100" dirty="0">
-                <a:solidFill>
-                  <a:srgbClr val="3A4356"/>
-                </a:solidFill>
-                <a:latin typeface="Pretendard Variable" pitchFamily="34" charset="0"/>
-                <a:ea typeface="Pretendard Variable" pitchFamily="34" charset="-122"/>
-                <a:cs typeface="Pretendard Variable" pitchFamily="34" charset="-120"/>
-              </a:rPr>
-              <a:t> · 제함기 2 </a:t>
-            </a:r>
-            <a:r>
-              <a:rPr lang="en-US" sz="1100" b="1" dirty="0">
-                <a:solidFill>
-                  <a:srgbClr val="C0392B"/>
-                </a:solidFill>
-                <a:latin typeface="Pretendard Variable" pitchFamily="34" charset="0"/>
-                <a:ea typeface="Pretendard Variable" pitchFamily="34" charset="-122"/>
-                <a:cs typeface="Pretendard Variable" pitchFamily="34" charset="-120"/>
-              </a:rPr>
-              <a:t>0%</a:t>
-            </a:r>
-            <a:r>
-              <a:rPr lang="en-US" sz="1100" dirty="0">
-                <a:solidFill>
-                  <a:srgbClr val="3A4356"/>
-                </a:solidFill>
-                <a:latin typeface="Pretendard Variable" pitchFamily="34" charset="0"/>
-                <a:ea typeface="Pretendard Variable" pitchFamily="34" charset="-122"/>
-                <a:cs typeface="Pretendard Variable" pitchFamily="34" charset="-120"/>
-              </a:rPr>
-              <a:t> → </a:t>
-            </a:r>
-            <a:r>
-              <a:rPr lang="en-US" sz="1100" b="1" dirty="0">
-                <a:solidFill>
-                  <a:srgbClr val="2E7D32"/>
-                </a:solidFill>
-                <a:latin typeface="Pretendard Variable" pitchFamily="34" charset="0"/>
-                <a:ea typeface="Pretendard Variable" pitchFamily="34" charset="-122"/>
-                <a:cs typeface="Pretendard Variable" pitchFamily="34" charset="-120"/>
-              </a:rPr>
-              <a:t>약 70%</a:t>
+              <a:t>→ 제함기 2 0% → 4.8% 활성화 · 제함기 1은 하류 정체로 100% 유지</a:t>
             </a:r>
             <a:endParaRPr lang="en-US" sz="1100" dirty="0"/>
           </a:p>
@@ -10599,62 +10193,7 @@
                 <a:ea typeface="Pretendard Variable" pitchFamily="34" charset="-122"/>
                 <a:cs typeface="Pretendard Variable" pitchFamily="34" charset="-120"/>
               </a:rPr>
-              <a:t>→ AGV 가동률 </a:t>
-            </a:r>
-            <a:r>
-              <a:rPr lang="en-US" sz="1100" b="1" dirty="0">
-                <a:solidFill>
-                  <a:srgbClr val="C0392B"/>
-                </a:solidFill>
-                <a:latin typeface="Pretendard Variable" pitchFamily="34" charset="0"/>
-                <a:ea typeface="Pretendard Variable" pitchFamily="34" charset="-122"/>
-                <a:cs typeface="Pretendard Variable" pitchFamily="34" charset="-120"/>
-              </a:rPr>
-              <a:t>23%</a:t>
-            </a:r>
-            <a:r>
-              <a:rPr lang="en-US" sz="1100" dirty="0">
-                <a:solidFill>
-                  <a:srgbClr val="3A4356"/>
-                </a:solidFill>
-                <a:latin typeface="Pretendard Variable" pitchFamily="34" charset="0"/>
-                <a:ea typeface="Pretendard Variable" pitchFamily="34" charset="-122"/>
-                <a:cs typeface="Pretendard Variable" pitchFamily="34" charset="-120"/>
-              </a:rPr>
-              <a:t> → </a:t>
-            </a:r>
-            <a:r>
-              <a:rPr lang="en-US" sz="1100" b="1" dirty="0">
-                <a:solidFill>
-                  <a:srgbClr val="2E7D32"/>
-                </a:solidFill>
-                <a:latin typeface="Pretendard Variable" pitchFamily="34" charset="0"/>
-                <a:ea typeface="Pretendard Variable" pitchFamily="34" charset="-122"/>
-                <a:cs typeface="Pretendard Variable" pitchFamily="34" charset="-120"/>
-              </a:rPr>
-              <a:t>50%</a:t>
-            </a:r>
-            <a:r>
-              <a:rPr lang="en-US" sz="1100" dirty="0">
-                <a:solidFill>
-                  <a:srgbClr val="3A4356"/>
-                </a:solidFill>
-                <a:latin typeface="Pretendard Variable" pitchFamily="34" charset="0"/>
-                <a:ea typeface="Pretendard Variable" pitchFamily="34" charset="-122"/>
-                <a:cs typeface="Pretendard Variable" pitchFamily="34" charset="-120"/>
-              </a:rPr>
-              <a:t> (×2.2) · 운영 대수 </a:t>
-            </a:r>
-            <a:r>
-              <a:rPr lang="en-US" sz="1100" b="1" dirty="0">
-                <a:solidFill>
-                  <a:srgbClr val="2E7D32"/>
-                </a:solidFill>
-                <a:latin typeface="Pretendard Variable" pitchFamily="34" charset="0"/>
-                <a:ea typeface="Pretendard Variable" pitchFamily="34" charset="-122"/>
-                <a:cs typeface="Pretendard Variable" pitchFamily="34" charset="-120"/>
-              </a:rPr>
-              <a:t>−15대 (−37.5%)</a:t>
+              <a:t>→ AGV 가동률 23% → 50% (×2.2) · 운영 대수 −15대 (−37.5%)</a:t>
             </a:r>
             <a:endParaRPr lang="en-US" sz="1100" dirty="0"/>
           </a:p>
@@ -10941,84 +10480,7 @@
                 <a:ea typeface="Pretendard Variable" pitchFamily="34" charset="-122"/>
                 <a:cs typeface="Pretendard Variable" pitchFamily="34" charset="-120"/>
               </a:rPr>
-              <a:t>→ 완료 지점 </a:t>
-            </a:r>
-            <a:r>
-              <a:rPr lang="en-US" sz="1100" b="1" dirty="0">
-                <a:solidFill>
-                  <a:srgbClr val="C0392B"/>
-                </a:solidFill>
-                <a:latin typeface="Pretendard Variable" pitchFamily="34" charset="0"/>
-                <a:ea typeface="Pretendard Variable" pitchFamily="34" charset="-122"/>
-                <a:cs typeface="Pretendard Variable" pitchFamily="34" charset="-120"/>
-              </a:rPr>
-              <a:t>1/60</a:t>
-            </a:r>
-            <a:r>
-              <a:rPr lang="en-US" sz="1100" dirty="0">
-                <a:solidFill>
-                  <a:srgbClr val="3A4356"/>
-                </a:solidFill>
-                <a:latin typeface="Pretendard Variable" pitchFamily="34" charset="0"/>
-                <a:ea typeface="Pretendard Variable" pitchFamily="34" charset="-122"/>
-                <a:cs typeface="Pretendard Variable" pitchFamily="34" charset="-120"/>
-              </a:rPr>
-              <a:t> → </a:t>
-            </a:r>
-            <a:r>
-              <a:rPr lang="en-US" sz="1100" b="1" dirty="0">
-                <a:solidFill>
-                  <a:srgbClr val="2E7D32"/>
-                </a:solidFill>
-                <a:latin typeface="Pretendard Variable" pitchFamily="34" charset="0"/>
-                <a:ea typeface="Pretendard Variable" pitchFamily="34" charset="-122"/>
-                <a:cs typeface="Pretendard Variable" pitchFamily="34" charset="-120"/>
-              </a:rPr>
-              <a:t>4/60 (×4배)</a:t>
-            </a:r>
-            <a:r>
-              <a:rPr lang="en-US" sz="1100" dirty="0">
-                <a:solidFill>
-                  <a:srgbClr val="3A4356"/>
-                </a:solidFill>
-                <a:latin typeface="Pretendard Variable" pitchFamily="34" charset="0"/>
-                <a:ea typeface="Pretendard Variable" pitchFamily="34" charset="-122"/>
-                <a:cs typeface="Pretendard Variable" pitchFamily="34" charset="-120"/>
-              </a:rPr>
-              <a:t> · 완료 팔레트 </a:t>
-            </a:r>
-            <a:r>
-              <a:rPr lang="en-US" sz="1100" b="1" dirty="0">
-                <a:solidFill>
-                  <a:srgbClr val="C0392B"/>
-                </a:solidFill>
-                <a:latin typeface="Pretendard Variable" pitchFamily="34" charset="0"/>
-                <a:ea typeface="Pretendard Variable" pitchFamily="34" charset="-122"/>
-                <a:cs typeface="Pretendard Variable" pitchFamily="34" charset="-120"/>
-              </a:rPr>
-              <a:t>8</a:t>
-            </a:r>
-            <a:r>
-              <a:rPr lang="en-US" sz="1100" dirty="0">
-                <a:solidFill>
-                  <a:srgbClr val="3A4356"/>
-                </a:solidFill>
-                <a:latin typeface="Pretendard Variable" pitchFamily="34" charset="0"/>
-                <a:ea typeface="Pretendard Variable" pitchFamily="34" charset="-122"/>
-                <a:cs typeface="Pretendard Variable" pitchFamily="34" charset="-120"/>
-              </a:rPr>
-              <a:t> → </a:t>
-            </a:r>
-            <a:r>
-              <a:rPr lang="en-US" sz="1100" b="1" dirty="0">
-                <a:solidFill>
-                  <a:srgbClr val="2E7D32"/>
-                </a:solidFill>
-                <a:latin typeface="Pretendard Variable" pitchFamily="34" charset="0"/>
-                <a:ea typeface="Pretendard Variable" pitchFamily="34" charset="-122"/>
-                <a:cs typeface="Pretendard Variable" pitchFamily="34" charset="-120"/>
-              </a:rPr>
-              <a:t>20 (+150%)</a:t>
+              <a:t>→ 완료 지점 1/60 → 3/60 (×3배) · 완료 팔레트 8 → 20 (+150%)</a:t>
             </a:r>
             <a:endParaRPr lang="en-US" sz="1100" dirty="0"/>
           </a:p>
@@ -11647,29 +11109,7 @@
                 <a:ea typeface="Pretendard Variable" pitchFamily="34" charset="-122"/>
                 <a:cs typeface="Pretendard Variable" pitchFamily="34" charset="-120"/>
               </a:rPr>
-              <a:t>→ </a:t>
-            </a:r>
-            <a:r>
-              <a:rPr lang="en-US" sz="1000" b="1" dirty="0">
-                <a:solidFill>
-                  <a:srgbClr val="F0A500"/>
-                </a:solidFill>
-                <a:latin typeface="Pretendard Variable" pitchFamily="34" charset="0"/>
-                <a:ea typeface="Pretendard Variable" pitchFamily="34" charset="-122"/>
-                <a:cs typeface="Pretendard Variable" pitchFamily="34" charset="-120"/>
-              </a:rPr>
-              <a:t>25대 최적</a:t>
-            </a:r>
-            <a:r>
-              <a:rPr lang="en-US" sz="1000" dirty="0">
-                <a:solidFill>
-                  <a:srgbClr val="E8F0FF"/>
-                </a:solidFill>
-                <a:latin typeface="Pretendard Variable" pitchFamily="34" charset="0"/>
-                <a:ea typeface="Pretendard Variable" pitchFamily="34" charset="-122"/>
-                <a:cs typeface="Pretendard Variable" pitchFamily="34" charset="-120"/>
-              </a:rPr>
-              <a:t> 검증 (20 / 35 교착)</a:t>
+              <a:t>→ 15~35대 처리량 동일 (20팔레트)</a:t>
             </a:r>
             <a:endParaRPr lang="en-US" sz="1000" dirty="0"/>
           </a:p>
@@ -12235,95 +11675,7 @@
                 <a:ea typeface="Pretendard Variable" pitchFamily="34" charset="-122"/>
                 <a:cs typeface="Pretendard Variable" pitchFamily="34" charset="-120"/>
               </a:rPr>
-              <a:t>→ </a:t>
-            </a:r>
-            <a:r>
-              <a:rPr lang="en-US" altLang="ko-KR" sz="1100" dirty="0">
-                <a:solidFill>
-                  <a:srgbClr val="3A4356"/>
-                </a:solidFill>
-                <a:latin typeface="Pretendard Variable" pitchFamily="34" charset="0"/>
-                <a:ea typeface="Pretendard Variable" pitchFamily="34" charset="-122"/>
-                <a:cs typeface="Pretendard Variable" pitchFamily="34" charset="-120"/>
-              </a:rPr>
-              <a:t>20·35</a:t>
-            </a:r>
-            <a:r>
-              <a:rPr lang="ko-KR" altLang="en-US" sz="1100" dirty="0">
-                <a:solidFill>
-                  <a:srgbClr val="3A4356"/>
-                </a:solidFill>
-                <a:latin typeface="Pretendard Variable" pitchFamily="34" charset="0"/>
-                <a:ea typeface="Pretendard Variable" pitchFamily="34" charset="-122"/>
-                <a:cs typeface="Pretendard Variable" pitchFamily="34" charset="-120"/>
-              </a:rPr>
-              <a:t>대 교착 해소 </a:t>
-            </a:r>
-            <a:r>
-              <a:rPr lang="en-US" altLang="ko-KR" sz="1100" dirty="0">
-                <a:solidFill>
-                  <a:srgbClr val="3A4356"/>
-                </a:solidFill>
-                <a:latin typeface="Pretendard Variable" pitchFamily="34" charset="0"/>
-                <a:ea typeface="Pretendard Variable" pitchFamily="34" charset="-122"/>
-                <a:cs typeface="Pretendard Variable" pitchFamily="34" charset="-120"/>
-              </a:rPr>
-              <a:t>· 25</a:t>
-            </a:r>
-            <a:r>
-              <a:rPr lang="ko-KR" altLang="en-US" sz="1100" dirty="0">
-                <a:solidFill>
-                  <a:srgbClr val="3A4356"/>
-                </a:solidFill>
-                <a:latin typeface="Pretendard Variable" pitchFamily="34" charset="0"/>
-                <a:ea typeface="Pretendard Variable" pitchFamily="34" charset="-122"/>
-                <a:cs typeface="Pretendard Variable" pitchFamily="34" charset="-120"/>
-              </a:rPr>
-              <a:t>대</a:t>
-            </a:r>
-            <a:r>
-              <a:rPr lang="en-US" altLang="ko-KR" sz="1100" dirty="0">
-                <a:solidFill>
-                  <a:srgbClr val="3A4356"/>
-                </a:solidFill>
-                <a:latin typeface="Pretendard Variable" pitchFamily="34" charset="0"/>
-                <a:ea typeface="Pretendard Variable" pitchFamily="34" charset="-122"/>
-                <a:cs typeface="Pretendard Variable" pitchFamily="34" charset="-120"/>
-              </a:rPr>
-              <a:t>(</a:t>
-            </a:r>
-            <a:r>
-              <a:rPr lang="en-US" altLang="ko-KR" sz="1100" dirty="0" err="1">
-                <a:solidFill>
-                  <a:srgbClr val="3A4356"/>
-                </a:solidFill>
-                <a:latin typeface="Pretendard Variable" pitchFamily="34" charset="0"/>
-                <a:ea typeface="Pretendard Variable" pitchFamily="34" charset="-122"/>
-                <a:cs typeface="Pretendard Variable" pitchFamily="34" charset="-120"/>
-              </a:rPr>
-              <a:t>agvCount</a:t>
-            </a:r>
-            <a:r>
-              <a:rPr lang="en-US" altLang="ko-KR" sz="1100" dirty="0">
-                <a:solidFill>
-                  <a:srgbClr val="3A4356"/>
-                </a:solidFill>
-                <a:latin typeface="Pretendard Variable" pitchFamily="34" charset="0"/>
-                <a:ea typeface="Pretendard Variable" pitchFamily="34" charset="-122"/>
-                <a:cs typeface="Pretendard Variable" pitchFamily="34" charset="-120"/>
-              </a:rPr>
-              <a:t>) </a:t>
-            </a:r>
-            <a:r>
-              <a:rPr lang="ko-KR" altLang="en-US" sz="1100" dirty="0">
-                <a:solidFill>
-                  <a:srgbClr val="3A4356"/>
-                </a:solidFill>
-                <a:latin typeface="Pretendard Variable" pitchFamily="34" charset="0"/>
-                <a:ea typeface="Pretendard Variable" pitchFamily="34" charset="-122"/>
-                <a:cs typeface="Pretendard Variable" pitchFamily="34" charset="-120"/>
-              </a:rPr>
-              <a:t>기준 시나리오 재현 가능</a:t>
+              <a:t>→ 안정화 설정으로 15~35대 정상 운영 · agvCount=25 기준 시나리오</a:t>
             </a:r>
             <a:endParaRPr lang="en-US" sz="1100" dirty="0"/>
           </a:p>
@@ -13121,7 +12473,7 @@
                 <a:ea typeface="Pretendard Variable" pitchFamily="34" charset="-122"/>
                 <a:cs typeface="Pretendard Variable" pitchFamily="34" charset="-120"/>
               </a:rPr>
-              <a:t>×4배</a:t>
+              <a:t>×3배</a:t>
             </a:r>
             <a:endParaRPr lang="en-US" sz="3300" dirty="0"/>
           </a:p>
@@ -13160,18 +12512,7 @@
                 <a:ea typeface="Pretendard Variable" pitchFamily="34" charset="-122"/>
                 <a:cs typeface="Pretendard Variable" pitchFamily="34" charset="-120"/>
               </a:rPr>
-              <a:t>1/60 </a:t>
-            </a:r>
-            <a:r>
-              <a:rPr lang="en-US" sz="1100">
-                <a:solidFill>
-                  <a:srgbClr val="C9D5EA"/>
-                </a:solidFill>
-                <a:latin typeface="Pretendard Variable" pitchFamily="34" charset="0"/>
-                <a:ea typeface="Pretendard Variable" pitchFamily="34" charset="-122"/>
-                <a:cs typeface="Pretendard Variable" pitchFamily="34" charset="-120"/>
-              </a:rPr>
-              <a:t>→ 4/60</a:t>
+              <a:t>1/60 → 3/60</a:t>
             </a:r>
             <a:endParaRPr lang="en-US" sz="1100" dirty="0"/>
           </a:p>
@@ -16517,7 +15858,7 @@
                 <a:ea typeface="Pretendard Variable" pitchFamily="34" charset="-122"/>
                 <a:cs typeface="Pretendard Variable" pitchFamily="34" charset="-120"/>
               </a:rPr>
-              <a:t>S/A 포함 : 이론 75% · 실제 DB 91.7%</a:t>
+              <a:t>S/A 포함 : 이론 91.6% · 실제 DB 91.7% 일치</a:t>
             </a:r>
             <a:endParaRPr lang="en-US" sz="1500" dirty="0"/>
           </a:p>
@@ -16621,18 +15962,7 @@
                 <a:ea typeface="Pretendard Variable" pitchFamily="34" charset="-122"/>
                 <a:cs typeface="Pretendard Variable" pitchFamily="34" charset="-120"/>
               </a:rPr>
-              <a:t>SKU 포함 확률 : S 50% · A 50% (독립 사건) → P(S∪A) = 1 − 0.5×0.5 = </a:t>
-            </a:r>
-            <a:r>
-              <a:rPr lang="en-US" sz="1200" b="1" dirty="0">
-                <a:solidFill>
-                  <a:srgbClr val="1A1F2E"/>
-                </a:solidFill>
-                <a:latin typeface="Pretendard Variable" pitchFamily="34" charset="0"/>
-                <a:ea typeface="Pretendard Variable" pitchFamily="34" charset="-122"/>
-                <a:cs typeface="Pretendard Variable" pitchFamily="34" charset="-120"/>
-              </a:rPr>
-              <a:t>0.75</a:t>
+              <a:t>S 50% · A 50% 독립 + 빈 주문→S급 규칙 → 이론 P(S/A) = 0.75 + 0.166 = 0.916</a:t>
             </a:r>
             <a:endParaRPr lang="en-US" sz="1200" dirty="0"/>
           </a:p>
@@ -16671,7 +16001,7 @@
                 <a:ea typeface="Pretendard Variable" pitchFamily="34" charset="-122"/>
                 <a:cs typeface="Pretendard Variable" pitchFamily="34" charset="-120"/>
               </a:rPr>
-              <a:t>B/C 전용 : 이론 25% · 실제 DB 8.3%</a:t>
+              <a:t>B/C 전용 : 이론 8.4% · 실제 DB 8.3%</a:t>
             </a:r>
             <a:endParaRPr lang="en-US" sz="1500" dirty="0"/>
           </a:p>
@@ -17615,7 +16945,7 @@
                 <a:ea typeface="Pretendard Variable" pitchFamily="34" charset="-122"/>
                 <a:cs typeface="Pretendard Variable" pitchFamily="34" charset="-120"/>
               </a:rPr>
-              <a:t>S/A 포함 박스 : 이론 75% · 실제 DB 91.7%가 제함기1로 몰림 · 제함기2는 S와 A가 동시에 없는 25% 조건에서만 후보</a:t>
+              <a:t>S/A 포함 박스 91.7%(DB)가 제함기1로 몰림 · 제함기2는 S와 A가 동시에 없는 경우에만 후보</a:t>
             </a:r>
             <a:endParaRPr lang="en-US" sz="1200" dirty="0"/>
           </a:p>
@@ -18295,7 +17625,7 @@
                           <a:ea typeface="Pretendard Variable" pitchFamily="34" charset="-122"/>
                           <a:cs typeface="Pretendard Variable" pitchFamily="34" charset="-120"/>
                         </a:rPr>
-                        <a:t>S/A 박스 91.7% (DB) · 이론 75% 단독 처리 (라우팅 편중)</a:t>
+                        <a:t>S/A 박스 91.7% (DB) 단독 처리 (라우팅 편중)</a:t>
                       </a:r>
                       <a:endParaRPr lang="en-US" sz="1275" dirty="0">
                         <a:latin typeface="Pretendard Variable" charset="0"/>
@@ -22159,7 +21489,7 @@
                 <a:ea typeface="Pretendard Variable" pitchFamily="34" charset="-122"/>
                 <a:cs typeface="Pretendard Variable" pitchFamily="34" charset="-120"/>
               </a:rPr>
-              <a:t>· 이론 P(S∪A) = 0.75 · 실제 DB S/A 91.7%</a:t>
+              <a:t>· 빈 주문→S급 규칙 반영 이론 91.6% = 실제 DB 91.7%</a:t>
             </a:r>
             <a:endParaRPr lang="en-US" sz="1100" dirty="0"/>
           </a:p>
@@ -22179,7 +21509,7 @@
                 <a:ea typeface="Pretendard Variable" pitchFamily="34" charset="-122"/>
                 <a:cs typeface="Pretendard Variable" pitchFamily="34" charset="-120"/>
               </a:rPr>
-              <a:t>· 5시간 초과 처리량은 PLE 제한 내 실측 + 추정치를 병기</a:t>
+              <a:t>· 전체 완료 시간은 5시간 초과 → PLE 제한 내 실측 처리량으로 비교</a:t>
             </a:r>
             <a:endParaRPr lang="en-US" sz="1100" dirty="0"/>
           </a:p>
@@ -22702,7 +22032,7 @@
         <p:spPr>
           <a:xfrm>
             <a:off x="2190902" y="6524244"/>
-            <a:ext cx="5715000" cy="228600"/>
+            <a:ext cx="10881360" cy="228600"/>
           </a:xfrm>
           <a:prstGeom prst="rect">
             <a:avLst/>
@@ -22724,8 +22054,8 @@
         </p:blipFill>
         <p:spPr>
           <a:xfrm>
-            <a:off x="7905902" y="6524244"/>
-            <a:ext cx="5715000" cy="228600"/>
+            <a:off x="13075920" y="6524244"/>
+            <a:ext cx="548640" cy="228600"/>
           </a:xfrm>
           <a:prstGeom prst="rect">
             <a:avLst/>
@@ -23482,7 +22812,7 @@
                 <a:ea typeface="Pretendard Variable" pitchFamily="34" charset="-122"/>
                 <a:cs typeface="Pretendard Variable" pitchFamily="34" charset="-120"/>
               </a:rPr>
-              <a:t>이론적 부하 분산 효과 · S/A 박스 8,120개 (91.7%)</a:t>
+              <a:t>실측 부하 분산 결과 · S/A 박스 8,120개 (91.7%)</a:t>
             </a:r>
             <a:endParaRPr lang="en-US" sz="900" dirty="0"/>
           </a:p>
@@ -23560,7 +22890,7 @@
                 <a:ea typeface="Pretendard Variable" pitchFamily="34" charset="-122"/>
                 <a:cs typeface="Pretendard Variable" pitchFamily="34" charset="-120"/>
               </a:rPr>
-              <a:t>제함기 1 75% · 제함기 2 0%</a:t>
+              <a:t>제함기 1 100% · 제함기 2 0%</a:t>
             </a:r>
             <a:endParaRPr lang="en-US" sz="1200" dirty="0"/>
           </a:p>
@@ -23638,62 +22968,7 @@
                 <a:ea typeface="Pretendard Variable" pitchFamily="34" charset="-122"/>
                 <a:cs typeface="Pretendard Variable" pitchFamily="34" charset="-120"/>
               </a:rPr>
-              <a:t>≈ 30% · 70% (</a:t>
-            </a:r>
-            <a:r>
-              <a:rPr lang="ko-KR" altLang="en-US" sz="1200" b="1" dirty="0">
-                <a:solidFill>
-                  <a:srgbClr val="2E7D32"/>
-                </a:solidFill>
-                <a:latin typeface="Pretendard Variable" pitchFamily="34" charset="0"/>
-                <a:ea typeface="Pretendard Variable" pitchFamily="34" charset="-122"/>
-                <a:cs typeface="Pretendard Variable" pitchFamily="34" charset="-120"/>
-              </a:rPr>
-              <a:t>이론 </a:t>
-            </a:r>
-            <a:r>
-              <a:rPr lang="en-US" sz="1200" b="1" dirty="0" err="1">
-                <a:solidFill>
-                  <a:srgbClr val="2E7D32"/>
-                </a:solidFill>
-                <a:latin typeface="Pretendard Variable" pitchFamily="34" charset="0"/>
-                <a:ea typeface="Pretendard Variable" pitchFamily="34" charset="-122"/>
-                <a:cs typeface="Pretendard Variable" pitchFamily="34" charset="-120"/>
-              </a:rPr>
-              <a:t>균등</a:t>
-            </a:r>
-            <a:r>
-              <a:rPr lang="en-US" sz="1200" b="1" dirty="0">
-                <a:solidFill>
-                  <a:srgbClr val="2E7D32"/>
-                </a:solidFill>
-                <a:latin typeface="Pretendard Variable" pitchFamily="34" charset="0"/>
-                <a:ea typeface="Pretendard Variable" pitchFamily="34" charset="-122"/>
-                <a:cs typeface="Pretendard Variable" pitchFamily="34" charset="-120"/>
-              </a:rPr>
-              <a:t> </a:t>
-            </a:r>
-            <a:r>
-              <a:rPr lang="ko-KR" altLang="en-US" sz="1200" b="1" dirty="0">
-                <a:solidFill>
-                  <a:srgbClr val="2E7D32"/>
-                </a:solidFill>
-                <a:latin typeface="Pretendard Variable" pitchFamily="34" charset="0"/>
-                <a:ea typeface="Pretendard Variable" pitchFamily="34" charset="-122"/>
-                <a:cs typeface="Pretendard Variable" pitchFamily="34" charset="-120"/>
-              </a:rPr>
-              <a:t>분배</a:t>
-            </a:r>
-            <a:r>
-              <a:rPr lang="en-US" altLang="ko-KR" sz="1200" b="1" dirty="0">
-                <a:solidFill>
-                  <a:srgbClr val="2E7D32"/>
-                </a:solidFill>
-                <a:latin typeface="Pretendard Variable" pitchFamily="34" charset="0"/>
-                <a:ea typeface="Pretendard Variable" pitchFamily="34" charset="-122"/>
-                <a:cs typeface="Pretendard Variable" pitchFamily="34" charset="-120"/>
-              </a:rPr>
-              <a:t>)</a:t>
+              <a:t>제함기 1 100% · 제함기 2 4.8% (하류 정체로 분산 제한)</a:t>
             </a:r>
             <a:endParaRPr lang="en-US" sz="1200" dirty="0"/>
           </a:p>
@@ -23774,106 +23049,7 @@
                 <a:ea typeface="Pretendard Variable" pitchFamily="34" charset="-122"/>
                 <a:cs typeface="Pretendard Variable" pitchFamily="34" charset="-120"/>
               </a:rPr>
-              <a:t>· 제함기 1대 기준 처리 시간 </a:t>
-            </a:r>
-            <a:r>
-              <a:rPr lang="en-US" sz="1200" b="1" dirty="0">
-                <a:solidFill>
-                  <a:srgbClr val="1A1F2E"/>
-                </a:solidFill>
-                <a:latin typeface="Pretendard Variable" pitchFamily="34" charset="0"/>
-                <a:ea typeface="Pretendard Variable" pitchFamily="34" charset="-122"/>
-                <a:cs typeface="Pretendard Variable" pitchFamily="34" charset="-120"/>
-              </a:rPr>
-              <a:t>절반 감소</a:t>
-            </a:r>
-            <a:r>
-              <a:rPr lang="en-US" sz="1200" dirty="0">
-                <a:solidFill>
-                  <a:srgbClr val="3A4356"/>
-                </a:solidFill>
-                <a:latin typeface="Pretendard Variable" pitchFamily="34" charset="0"/>
-                <a:ea typeface="Pretendard Variable" pitchFamily="34" charset="-122"/>
-                <a:cs typeface="Pretendard Variable" pitchFamily="34" charset="-120"/>
-              </a:rPr>
-              <a:t> → AGV </a:t>
-            </a:r>
-            <a:r>
-              <a:rPr lang="en-US" sz="1200" dirty="0" err="1">
-                <a:solidFill>
-                  <a:srgbClr val="3A4356"/>
-                </a:solidFill>
-                <a:latin typeface="Pretendard Variable" pitchFamily="34" charset="0"/>
-                <a:ea typeface="Pretendard Variable" pitchFamily="34" charset="-122"/>
-                <a:cs typeface="Pretendard Variable" pitchFamily="34" charset="-120"/>
-              </a:rPr>
-              <a:t>공급</a:t>
-            </a:r>
-            <a:r>
-              <a:rPr lang="en-US" sz="1200" dirty="0">
-                <a:solidFill>
-                  <a:srgbClr val="3A4356"/>
-                </a:solidFill>
-                <a:latin typeface="Pretendard Variable" pitchFamily="34" charset="0"/>
-                <a:ea typeface="Pretendard Variable" pitchFamily="34" charset="-122"/>
-                <a:cs typeface="Pretendard Variable" pitchFamily="34" charset="-120"/>
-              </a:rPr>
-              <a:t> </a:t>
-            </a:r>
-            <a:r>
-              <a:rPr lang="en-US" sz="1200" dirty="0" err="1">
-                <a:solidFill>
-                  <a:srgbClr val="3A4356"/>
-                </a:solidFill>
-                <a:latin typeface="Pretendard Variable" pitchFamily="34" charset="0"/>
-                <a:ea typeface="Pretendard Variable" pitchFamily="34" charset="-122"/>
-                <a:cs typeface="Pretendard Variable" pitchFamily="34" charset="-120"/>
-              </a:rPr>
-              <a:t>속도</a:t>
-            </a:r>
-            <a:r>
-              <a:rPr lang="en-US" sz="1200" dirty="0">
-                <a:solidFill>
-                  <a:srgbClr val="3A4356"/>
-                </a:solidFill>
-                <a:latin typeface="Pretendard Variable" pitchFamily="34" charset="0"/>
-                <a:ea typeface="Pretendard Variable" pitchFamily="34" charset="-122"/>
-                <a:cs typeface="Pretendard Variable" pitchFamily="34" charset="-120"/>
-              </a:rPr>
-              <a:t> </a:t>
-            </a:r>
-            <a:r>
-              <a:rPr lang="ko-KR" altLang="en-US" sz="1200" dirty="0">
-                <a:solidFill>
-                  <a:srgbClr val="3A4356"/>
-                </a:solidFill>
-                <a:latin typeface="Pretendard Variable" pitchFamily="34" charset="0"/>
-                <a:ea typeface="Pretendard Variable" pitchFamily="34" charset="-122"/>
-                <a:cs typeface="Pretendard Variable" pitchFamily="34" charset="-120"/>
-              </a:rPr>
-              <a:t>이론상</a:t>
-            </a:r>
-            <a:r>
-              <a:rPr lang="en-US" sz="1200" dirty="0">
-                <a:solidFill>
-                  <a:srgbClr val="3A4356"/>
-                </a:solidFill>
-                <a:latin typeface="Pretendard Variable" pitchFamily="34" charset="0"/>
-                <a:ea typeface="Pretendard Variable" pitchFamily="34" charset="-122"/>
-                <a:cs typeface="Pretendard Variable" pitchFamily="34" charset="-120"/>
-              </a:rPr>
-              <a:t> </a:t>
-            </a:r>
-            <a:r>
-              <a:rPr lang="en-US" sz="1200" b="1" dirty="0">
-                <a:solidFill>
-                  <a:srgbClr val="1A1F2E"/>
-                </a:solidFill>
-                <a:latin typeface="Pretendard Variable" pitchFamily="34" charset="0"/>
-                <a:ea typeface="Pretendard Variable" pitchFamily="34" charset="-122"/>
-                <a:cs typeface="Pretendard Variable" pitchFamily="34" charset="-120"/>
-              </a:rPr>
-              <a:t>2배</a:t>
+              <a:t>· 이론상 처리 시간 절반 감소 가능하나, 실측 기여는 제한적 (하류 병목 지배)</a:t>
             </a:r>
             <a:endParaRPr lang="en-US" sz="1200" dirty="0"/>
           </a:p>
@@ -23893,18 +23069,7 @@
                 <a:ea typeface="Pretendard Variable" pitchFamily="34" charset="-122"/>
                 <a:cs typeface="Pretendard Variable" pitchFamily="34" charset="-120"/>
               </a:rPr>
-              <a:t>· 하류 공정 (피킹 → 봉함 → 팔레타이징) 전반 처리량 증가 · </a:t>
-            </a:r>
-            <a:r>
-              <a:rPr lang="en-US" sz="1200" b="1" dirty="0">
-                <a:solidFill>
-                  <a:srgbClr val="0B2545"/>
-                </a:solidFill>
-                <a:latin typeface="Pretendard Variable" pitchFamily="34" charset="0"/>
-                <a:ea typeface="Pretendard Variable" pitchFamily="34" charset="-122"/>
-                <a:cs typeface="Pretendard Variable" pitchFamily="34" charset="-120"/>
-              </a:rPr>
-              <a:t>selectOutput1 조건 1줄만 추가하는 Zero-Cost 개선</a:t>
+              <a:t>· 하류 병목 해소 시 전 공정 처리량 증가 기대 · selectOutput1 조건 1줄만 추가하는 Zero-Cost 개선</a:t>
             </a:r>
             <a:endParaRPr lang="en-US" sz="1200" dirty="0"/>
           </a:p>
@@ -24552,29 +23717,8 @@
                 <a:ea typeface="Pretendard Variable" pitchFamily="34" charset="-122"/>
                 <a:cs typeface="Pretendard Variable" pitchFamily="34" charset="-120"/>
               </a:rPr>
-              <a:t>S/A급 스테이션 (S 3개 + A 7개, 총 10개)과 이동 경로를 고려할 때, </a:t>
-            </a:r>
-            <a:r>
-              <a:rPr lang="en-US" sz="1200" b="1" dirty="0">
-                <a:solidFill>
-                  <a:srgbClr val="1A1F2E"/>
-                </a:solidFill>
-                <a:latin typeface="Pretendard Variable" pitchFamily="34" charset="0"/>
-                <a:ea typeface="Pretendard Variable" pitchFamily="34" charset="-122"/>
-                <a:cs typeface="Pretendard Variable" pitchFamily="34" charset="-120"/>
-              </a:rPr>
-              <a:t>25대는 동선 충돌을 최소화하면서 충분한 처리 용량을 제공하는 최적 대수</a:t>
-            </a:r>
-            <a:r>
-              <a:rPr lang="en-US" sz="1200" dirty="0">
-                <a:solidFill>
-                  <a:srgbClr val="3A4356"/>
-                </a:solidFill>
-                <a:latin typeface="Pretendard Variable" pitchFamily="34" charset="0"/>
-                <a:ea typeface="Pretendard Variable" pitchFamily="34" charset="-122"/>
-                <a:cs typeface="Pretendard Variable" pitchFamily="34" charset="-120"/>
-              </a:rPr>
-              <a:t>다.</a:t>
+              <a:t>S/A급 스테이션 (S 3개 + A 7개, 총 10개)을 기준으로 AGV를 40대에서 25대로 축소하였다. 민감도 실험(15·20·25·35대) 결과 5시간 완료 팔레트는 모두 20개로 동일하여, 15~35대 구간에서는 AGV가 처리량 병목이 아님을 확인하였다.
+과다 투입 시 → 동선 대기 · 가동률 분산 · 운영비 증가</a:t>
             </a:r>
             <a:endParaRPr lang="en-US" sz="1200" dirty="0"/>
           </a:p>
@@ -24603,7 +23747,7 @@
                 <a:ea typeface="Pretendard Variable" pitchFamily="34" charset="-122"/>
                 <a:cs typeface="Pretendard Variable" pitchFamily="34" charset="-120"/>
               </a:rPr>
-              <a:t>과다 시 → 동선 충돌 · 교통 혼잡 증가 · 처리량 감소</a:t>
+              <a:t/>
             </a:r>
             <a:endParaRPr lang="en-US" sz="1200" dirty="0"/>
           </a:p>
@@ -25172,18 +24316,7 @@
                 <a:ea typeface="Pretendard Variable" pitchFamily="34" charset="-122"/>
                 <a:cs typeface="Pretendard Variable" pitchFamily="34" charset="-120"/>
               </a:rPr>
-              <a:t>약 50</a:t>
-            </a:r>
-            <a:r>
-              <a:rPr lang="en-US" sz="1900" b="1" kern="0" spc="-112" dirty="0">
-                <a:solidFill>
-                  <a:srgbClr val="2E7D32"/>
-                </a:solidFill>
-                <a:latin typeface="Pretendard Variable" pitchFamily="34" charset="0"/>
-                <a:ea typeface="Pretendard Variable" pitchFamily="34" charset="-122"/>
-                <a:cs typeface="Pretendard Variable" pitchFamily="34" charset="-120"/>
-              </a:rPr>
-              <a:t>%</a:t>
+              <a:t>50%</a:t>
             </a:r>
             <a:endParaRPr lang="en-US" sz="3900" dirty="0"/>
           </a:p>
@@ -25222,18 +24355,7 @@
                 <a:ea typeface="Pretendard Variable" pitchFamily="34" charset="-122"/>
                 <a:cs typeface="Pretendard Variable" pitchFamily="34" charset="-120"/>
               </a:rPr>
-              <a:t>▲ +27%p (약 2.2배 향상)</a:t>
-            </a:r>
-            <a:r>
-              <a:rPr lang="en-US" sz="1300" dirty="0">
-                <a:solidFill>
-                  <a:srgbClr val="3A4356"/>
-                </a:solidFill>
-                <a:latin typeface="Pretendard Variable" pitchFamily="34" charset="0"/>
-                <a:ea typeface="Pretendard Variable" pitchFamily="34" charset="-122"/>
-                <a:cs typeface="Pretendard Variable" pitchFamily="34" charset="-120"/>
-              </a:rPr>
-              <a:t> · 더 적은 자원으로 더 높은 활용</a:t>
+              <a:t>▲ +27%p (약 2.2배 향상) · 더 적은 자원으로 더 높은 활용</a:t>
             </a:r>
             <a:endParaRPr lang="en-US" sz="1300" dirty="0"/>
           </a:p>
@@ -25398,29 +24520,7 @@
                 <a:ea typeface="Pretendard Variable" pitchFamily="34" charset="-122"/>
                 <a:cs typeface="Pretendard Variable" pitchFamily="34" charset="-120"/>
               </a:rPr>
-              <a:t>· </a:t>
-            </a:r>
-            <a:r>
-              <a:rPr lang="en-US" sz="1200" b="1" dirty="0">
-                <a:solidFill>
-                  <a:srgbClr val="FFFFFF"/>
-                </a:solidFill>
-                <a:latin typeface="Pretendard Variable" pitchFamily="34" charset="0"/>
-                <a:ea typeface="Pretendard Variable" pitchFamily="34" charset="-122"/>
-                <a:cs typeface="Pretendard Variable" pitchFamily="34" charset="-120"/>
-              </a:rPr>
-              <a:t>혼잡 완화</a:t>
-            </a:r>
-            <a:r>
-              <a:rPr lang="en-US" sz="1200" dirty="0">
-                <a:solidFill>
-                  <a:srgbClr val="E8F0FF"/>
-                </a:solidFill>
-                <a:latin typeface="Pretendard Variable" pitchFamily="34" charset="0"/>
-                <a:ea typeface="Pretendard Variable" pitchFamily="34" charset="-122"/>
-                <a:cs typeface="Pretendard Variable" pitchFamily="34" charset="-120"/>
-              </a:rPr>
-              <a:t> : 대수 25로 조정 → 동선 충돌 대기 감소</a:t>
+              <a:t>· Fleet 축소 : 40→25대 → 동일 처리량 유지하며 운영비 절감</a:t>
             </a:r>
             <a:endParaRPr lang="en-US" sz="1200" dirty="0"/>
           </a:p>
@@ -28827,29 +27927,7 @@
                 <a:ea typeface="Pretendard Variable" pitchFamily="34" charset="-122"/>
                 <a:cs typeface="Pretendard Variable" pitchFamily="34" charset="-120"/>
               </a:rPr>
-              <a:t>1/60 </a:t>
-            </a:r>
-            <a:r>
-              <a:rPr lang="en-US" sz="3300" b="1" kern="0" spc="-75" dirty="0">
-                <a:solidFill>
-                  <a:srgbClr val="6B7488"/>
-                </a:solidFill>
-                <a:latin typeface="Pretendard Variable" pitchFamily="34" charset="0"/>
-                <a:ea typeface="Pretendard Variable" pitchFamily="34" charset="-122"/>
-                <a:cs typeface="Pretendard Variable" pitchFamily="34" charset="-120"/>
-              </a:rPr>
-              <a:t>→ </a:t>
-            </a:r>
-            <a:r>
-              <a:rPr lang="en-US" sz="3300" b="1" kern="0" spc="-75" dirty="0">
-                <a:solidFill>
-                  <a:srgbClr val="2E7D32"/>
-                </a:solidFill>
-                <a:latin typeface="Pretendard Variable" pitchFamily="34" charset="0"/>
-                <a:ea typeface="Pretendard Variable" pitchFamily="34" charset="-122"/>
-                <a:cs typeface="Pretendard Variable" pitchFamily="34" charset="-120"/>
-              </a:rPr>
-              <a:t>4/60</a:t>
+              <a:t>1/60 → 3/60</a:t>
             </a:r>
             <a:endParaRPr lang="en-US" sz="3300" dirty="0"/>
           </a:p>
@@ -28888,7 +27966,7 @@
                 <a:ea typeface="Pretendard Variable" pitchFamily="34" charset="-122"/>
                 <a:cs typeface="Pretendard Variable" pitchFamily="34" charset="-120"/>
               </a:rPr>
-              <a:t>×4배 · AGV 40→25대</a:t>
+              <a:t>×3배 · AGV 40→25대</a:t>
             </a:r>
             <a:endParaRPr lang="en-US" sz="1500" dirty="0"/>
           </a:p>
@@ -28927,51 +28005,7 @@
                 <a:ea typeface="Pretendard Variable" pitchFamily="34" charset="-122"/>
                 <a:cs typeface="Pretendard Variable" pitchFamily="34" charset="-120"/>
               </a:rPr>
-              <a:t>더 적은 </a:t>
-            </a:r>
-            <a:r>
-              <a:rPr lang="en-US" sz="1100" dirty="0" err="1">
-                <a:solidFill>
-                  <a:srgbClr val="3A4356"/>
-                </a:solidFill>
-                <a:latin typeface="Pretendard Variable" pitchFamily="34" charset="0"/>
-                <a:ea typeface="Pretendard Variable" pitchFamily="34" charset="-122"/>
-                <a:cs typeface="Pretendard Variable" pitchFamily="34" charset="-120"/>
-              </a:rPr>
-              <a:t>자원으로</a:t>
-            </a:r>
-            <a:r>
-              <a:rPr lang="en-US" sz="1100" dirty="0">
-                <a:solidFill>
-                  <a:srgbClr val="3A4356"/>
-                </a:solidFill>
-                <a:latin typeface="Pretendard Variable" pitchFamily="34" charset="0"/>
-                <a:ea typeface="Pretendard Variable" pitchFamily="34" charset="-122"/>
-                <a:cs typeface="Pretendard Variable" pitchFamily="34" charset="-120"/>
-              </a:rPr>
-              <a:t> </a:t>
-            </a:r>
-            <a:r>
-              <a:rPr lang="en-US" sz="1100" b="1" dirty="0">
-                <a:solidFill>
-                  <a:srgbClr val="1A1F2E"/>
-                </a:solidFill>
-                <a:latin typeface="Pretendard Variable" pitchFamily="34" charset="0"/>
-                <a:ea typeface="Pretendard Variable" pitchFamily="34" charset="-122"/>
-                <a:cs typeface="Pretendard Variable" pitchFamily="34" charset="-120"/>
-              </a:rPr>
-              <a:t>4배 지점</a:t>
-            </a:r>
-            <a:r>
-              <a:rPr lang="en-US" sz="1100" dirty="0">
-                <a:solidFill>
-                  <a:srgbClr val="3A4356"/>
-                </a:solidFill>
-                <a:latin typeface="Pretendard Variable" pitchFamily="34" charset="0"/>
-                <a:ea typeface="Pretendard Variable" pitchFamily="34" charset="-122"/>
-                <a:cs typeface="Pretendard Variable" pitchFamily="34" charset="-120"/>
-              </a:rPr>
-              <a:t> 완료</a:t>
+              <a:t>더 적은 자원으로 3배 지점 완료</a:t>
             </a:r>
             <a:endParaRPr lang="en-US" sz="1100" dirty="0"/>
           </a:p>
@@ -30354,7 +29388,7 @@
                           <a:ea typeface="Pretendard Variable" pitchFamily="34" charset="-122"/>
                           <a:cs typeface="Pretendard Variable" pitchFamily="34" charset="-120"/>
                         </a:rPr>
-                        <a:t>4 / 60</a:t>
+                        <a:t>3 / 60</a:t>
                       </a:r>
                       <a:endParaRPr lang="en-US" sz="1125" dirty="0">
                         <a:latin typeface="Pretendard Variable" charset="0"/>
@@ -30422,7 +29456,7 @@
                           <a:ea typeface="Pretendard Variable" pitchFamily="34" charset="-122"/>
                           <a:cs typeface="Pretendard Variable" pitchFamily="34" charset="-120"/>
                         </a:rPr>
-                        <a:t>×4 배</a:t>
+                        <a:t>×3 배</a:t>
                       </a:r>
                       <a:endParaRPr lang="en-US" sz="1125" dirty="0">
                         <a:latin typeface="Pretendard Variable" charset="0"/>
@@ -30934,7 +29968,7 @@
                           <a:ea typeface="Pretendard Variable" pitchFamily="34" charset="-122"/>
                           <a:cs typeface="Pretendard Variable" pitchFamily="34" charset="-120"/>
                         </a:rPr>
-                        <a:t>약 30%</a:t>
+                        <a:t>≈ 100% (정체 지속)</a:t>
                       </a:r>
                       <a:endParaRPr lang="en-US" sz="1125" dirty="0">
                         <a:latin typeface="Pretendard Variable" charset="0"/>
@@ -31002,7 +30036,7 @@
                           <a:ea typeface="Pretendard Variable" pitchFamily="34" charset="-122"/>
                           <a:cs typeface="Pretendard Variable" pitchFamily="34" charset="-120"/>
                         </a:rPr>
-                        <a:t>▼ −70%p (병목 해소)</a:t>
+                        <a:t>하류 정체 역전파 (개선 제한)</a:t>
                       </a:r>
                       <a:endParaRPr lang="en-US" sz="1125" dirty="0">
                         <a:latin typeface="Pretendard Variable" charset="0"/>
@@ -31213,7 +30247,7 @@
                           <a:ea typeface="Pretendard Variable" pitchFamily="34" charset="-122"/>
                           <a:cs typeface="Pretendard Variable" pitchFamily="34" charset="-120"/>
                         </a:rPr>
-                        <a:t>약 70%</a:t>
+                        <a:t>약 4.8%</a:t>
                       </a:r>
                       <a:endParaRPr lang="en-US" sz="1125" dirty="0">
                         <a:latin typeface="Pretendard Variable" charset="0"/>
@@ -31281,7 +30315,7 @@
                           <a:ea typeface="Pretendard Variable" pitchFamily="34" charset="-122"/>
                           <a:cs typeface="Pretendard Variable" pitchFamily="34" charset="-120"/>
                         </a:rPr>
-                        <a:t>▲ 유휴 자원 활용화</a:t>
+                        <a:t>▲ 소폭 활성화 (0%→4.8%)</a:t>
                       </a:r>
                       <a:endParaRPr lang="en-US" sz="1125" dirty="0">
                         <a:latin typeface="Pretendard Variable" charset="0"/>
@@ -31492,7 +30526,7 @@
                           <a:ea typeface="Pretendard Variable" pitchFamily="34" charset="-122"/>
                           <a:cs typeface="Pretendard Variable" pitchFamily="34" charset="-120"/>
                         </a:rPr>
-                        <a:t>약 50%</a:t>
+                        <a:t>50%</a:t>
                       </a:r>
                       <a:endParaRPr lang="en-US" sz="1125" dirty="0">
                         <a:latin typeface="Pretendard Variable" charset="0"/>
